--- a/CommonBirds/target/classes/web/html/Condor_Presentation.pptx
+++ b/CommonBirds/target/classes/web/html/Condor_Presentation.pptx
@@ -27,9 +27,10 @@
     <p:sldId id="275" r:id="rId21"/>
     <p:sldId id="276" r:id="rId22"/>
     <p:sldId id="277" r:id="rId23"/>
+    <p:sldId id="278" r:id="rId24"/>
   </p:sldIdLst>
   <p:notesMasterIdLst>
-    <p:notesMasterId r:id="rId24"/>
+    <p:notesMasterId r:id="rId25"/>
   </p:notesMasterIdLst>
   <p:sldSz cx="12192000" cy="6858000"/>
   <p:notesSz cx="6858000" cy="12192000"/>
@@ -1797,6 +1798,94 @@
 </p:notes>
 </file>
 
+<file path=ppt/notesSlides/notesSlide23.xml><?xml version="1.0" encoding="utf-8"?>
+<p:notes xmlns:a="http://schemas.openxmlformats.org/drawingml/2006/main" xmlns:r="http://schemas.openxmlformats.org/officeDocument/2006/relationships" xmlns:p="http://schemas.openxmlformats.org/presentationml/2006/main">
+  <p:cSld>
+    <p:spTree>
+      <p:nvGrpSpPr>
+        <p:cNvPr id="1" name=""/>
+        <p:cNvGrpSpPr/>
+        <p:nvPr/>
+      </p:nvGrpSpPr>
+      <p:grpSpPr>
+        <a:xfrm>
+          <a:off x="0" y="0"/>
+          <a:ext cx="0" cy="0"/>
+          <a:chOff x="0" y="0"/>
+          <a:chExt cx="0" cy="0"/>
+        </a:xfrm>
+      </p:grpSpPr>
+      <p:sp>
+        <p:nvSpPr>
+          <p:cNvPr id="2" name="Slide Image Placeholder 1"/>
+          <p:cNvSpPr>
+            <a:spLocks noGrp="1" noRot="1" noChangeAspect="1"/>
+          </p:cNvSpPr>
+          <p:nvPr>
+            <p:ph type="sldImg"/>
+          </p:nvPr>
+        </p:nvSpPr>
+        <p:spPr/>
+      </p:sp>
+      <p:sp>
+        <p:nvSpPr>
+          <p:cNvPr id="3" name="Notes Placeholder 2"/>
+          <p:cNvSpPr>
+            <a:spLocks noGrp="1"/>
+          </p:cNvSpPr>
+          <p:nvPr>
+            <p:ph type="body" idx="1"/>
+          </p:nvPr>
+        </p:nvSpPr>
+        <p:spPr/>
+        <p:txBody>
+          <a:bodyPr/>
+          <a:lstStyle/>
+          <a:p>
+            <a:r>
+              <a:rPr lang="en-US" dirty="0"/>
+              <a:t/>
+            </a:r>
+            <a:endParaRPr lang="en-US" dirty="0"/>
+          </a:p>
+        </p:txBody>
+      </p:sp>
+      <p:sp>
+        <p:nvSpPr>
+          <p:cNvPr id="4" name="Slide Number Placeholder 3"/>
+          <p:cNvSpPr>
+            <a:spLocks noGrp="1"/>
+          </p:cNvSpPr>
+          <p:nvPr>
+            <p:ph type="sldNum" sz="quarter" idx="10"/>
+          </p:nvPr>
+        </p:nvSpPr>
+        <p:spPr/>
+        <p:txBody>
+          <a:bodyPr/>
+          <a:lstStyle/>
+          <a:p>
+            <a:fld id="{F7021451-1387-4CA6-816F-3879F97B5CBC}" type="slidenum">
+              <a:rPr lang="en-US"/>
+              <a:t>23</a:t>
+            </a:fld>
+            <a:endParaRPr lang="en-US"/>
+          </a:p>
+        </p:txBody>
+      </p:sp>
+    </p:spTree>
+    <p:extLst>
+      <p:ext uri="{BB962C8B-B14F-4D97-AF65-F5344CB8AC3E}">
+        <p14:creationId xmlns:p14="http://schemas.microsoft.com/office/powerpoint/2010/main" val="1024086991"/>
+      </p:ext>
+    </p:extLst>
+  </p:cSld>
+  <p:clrMapOvr>
+    <a:masterClrMapping/>
+  </p:clrMapOvr>
+</p:notes>
+</file>
+
 <file path=ppt/notesSlides/notesSlide3.xml><?xml version="1.0" encoding="utf-8"?>
 <p:notes xmlns:a="http://schemas.openxmlformats.org/drawingml/2006/main" xmlns:r="http://schemas.openxmlformats.org/officeDocument/2006/relationships" xmlns:p="http://schemas.openxmlformats.org/presentationml/2006/main">
   <p:cSld>
@@ -8587,7 +8676,7 @@
         <p:spPr>
           <a:xfrm>
             <a:off x="548640" y="347472"/>
-            <a:ext cx="1545336" cy="274320"/>
+            <a:ext cx="1641348" cy="274320"/>
           </a:xfrm>
           <a:prstGeom prst="roundRect">
             <a:avLst>
@@ -8595,11 +8684,11 @@
             </a:avLst>
           </a:prstGeom>
           <a:solidFill>
-            <a:srgbClr val="DFF2E1"/>
+            <a:srgbClr val="F7DDE6"/>
           </a:solidFill>
           <a:ln w="9525">
             <a:solidFill>
-              <a:srgbClr val="5FA873"/>
+              <a:srgbClr val="C2547D"/>
             </a:solidFill>
           </a:ln>
         </p:spPr>
@@ -8613,13 +8702,13 @@
             <a:r>
               <a:rPr lang="en-US" sz="1000" b="1" spc="100" kern="0" dirty="0">
                 <a:solidFill>
-                  <a:srgbClr val="205C2E"/>
-                </a:solidFill>
-                <a:latin typeface="Calibri" pitchFamily="34" charset="0"/>
-                <a:ea typeface="Calibri" pitchFamily="34" charset="-122"/>
-                <a:cs typeface="Calibri" pitchFamily="34" charset="-120"/>
-              </a:rPr>
-              <a:t>REUSE AND HELP</a:t>
+                  <a:srgbClr val="6B1F3B"/>
+                </a:solidFill>
+                <a:latin typeface="Calibri" pitchFamily="34" charset="0"/>
+                <a:ea typeface="Calibri" pitchFamily="34" charset="-122"/>
+                <a:cs typeface="Calibri" pitchFamily="34" charset="-120"/>
+              </a:rPr>
+              <a:t>REVIEW AND SAVE</a:t>
             </a:r>
             <a:endParaRPr lang="en-US" sz="1000" dirty="0"/>
           </a:p>
@@ -8658,7 +8747,7 @@
                 <a:ea typeface="Cambria" pitchFamily="34" charset="-122"/>
                 <a:cs typeface="Cambria" pitchFamily="34" charset="-120"/>
               </a:rPr>
-              <a:t>Loading, sharing and downloading</a:t>
+              <a:t>Requesting your Condor basket</a:t>
             </a:r>
             <a:endParaRPr lang="en-US" sz="3000" dirty="0"/>
           </a:p>
@@ -8744,271 +8833,14 @@
       </p:sp>
       <p:sp>
         <p:nvSpPr>
-          <p:cNvPr id="6" name="Text 4"/>
-          <p:cNvSpPr txBox="1"/>
-          <p:nvPr/>
-        </p:nvSpPr>
-        <p:spPr>
-          <a:xfrm>
-            <a:off x="548640" y="1371600"/>
-            <a:ext cx="4663440" cy="1554480"/>
-          </a:xfrm>
-          <a:prstGeom prst="roundRect">
-            <a:avLst>
-              <a:gd name="adj" fmla="val 5882"/>
-            </a:avLst>
-          </a:prstGeom>
-          <a:solidFill>
-            <a:srgbClr val="DFF2E1"/>
-          </a:solidFill>
-          <a:ln w="9525">
-            <a:solidFill>
-              <a:srgbClr val="5FA873"/>
-            </a:solidFill>
-          </a:ln>
-        </p:spPr>
-        <p:txBody>
-          <a:bodyPr wrap="square" lIns="101600" tIns="152400" rIns="152400" bIns="101600" rtlCol="0" anchor="t"/>
-          <a:lstStyle/>
-          <a:p>
-            <a:pPr algn="l" indent="0" marL="0">
-              <a:spcAft>
-                <a:spcPts val="300"/>
-              </a:spcAft>
-              <a:buNone/>
-            </a:pPr>
-            <a:r>
-              <a:rPr lang="en-US" sz="1500" b="1" dirty="0">
-                <a:solidFill>
-                  <a:srgbClr val="205C2E"/>
-                </a:solidFill>
-                <a:latin typeface="Calibri" pitchFamily="34" charset="0"/>
-                <a:ea typeface="Calibri" pitchFamily="34" charset="-122"/>
-                <a:cs typeface="Calibri" pitchFamily="34" charset="-120"/>
-              </a:rPr>
-              <a:t>Load / Share My Basket</a:t>
-            </a:r>
-            <a:endParaRPr lang="en-US" sz="1500" dirty="0"/>
-          </a:p>
-          <a:p>
-            <a:pPr algn="l" indent="0" marL="0">
-              <a:spcAft>
-                <a:spcPts val="300"/>
-              </a:spcAft>
-              <a:buNone/>
-            </a:pPr>
-            <a:r>
-              <a:rPr lang="en-US" sz="1300" dirty="0">
-                <a:solidFill>
-                  <a:srgbClr val="2B1B3D"/>
-                </a:solidFill>
-                <a:latin typeface="Calibri" pitchFamily="34" charset="0"/>
-                <a:ea typeface="Calibri" pitchFamily="34" charset="-122"/>
-                <a:cs typeface="Calibri" pitchFamily="34" charset="-120"/>
-              </a:rPr>
-              <a:t>Your saved baskets, newest first. Select one to load it into your working basket, or share it with other users.</a:t>
-            </a:r>
-            <a:endParaRPr lang="en-US" sz="1500" dirty="0"/>
-          </a:p>
-        </p:txBody>
-      </p:sp>
-      <p:sp>
-        <p:nvSpPr>
-          <p:cNvPr id="7" name="Text 5"/>
-          <p:cNvSpPr txBox="1"/>
-          <p:nvPr/>
-        </p:nvSpPr>
-        <p:spPr>
-          <a:xfrm>
-            <a:off x="548640" y="3108960"/>
-            <a:ext cx="4663440" cy="1143000"/>
-          </a:xfrm>
-          <a:prstGeom prst="roundRect">
-            <a:avLst>
-              <a:gd name="adj" fmla="val 8000"/>
-            </a:avLst>
-          </a:prstGeom>
-          <a:solidFill>
-            <a:srgbClr val="DCE8F7"/>
-          </a:solidFill>
-          <a:ln w="9525">
-            <a:solidFill>
-              <a:srgbClr val="5B84B5"/>
-            </a:solidFill>
-          </a:ln>
-        </p:spPr>
-        <p:txBody>
-          <a:bodyPr wrap="square" lIns="101600" tIns="152400" rIns="152400" bIns="101600" rtlCol="0" anchor="t"/>
-          <a:lstStyle/>
-          <a:p>
-            <a:pPr algn="l" indent="0" marL="0">
-              <a:spcAft>
-                <a:spcPts val="300"/>
-              </a:spcAft>
-              <a:buNone/>
-            </a:pPr>
-            <a:r>
-              <a:rPr lang="en-US" sz="1500" b="1" dirty="0">
-                <a:solidFill>
-                  <a:srgbClr val="1D3E66"/>
-                </a:solidFill>
-                <a:latin typeface="Calibri" pitchFamily="34" charset="0"/>
-                <a:ea typeface="Calibri" pitchFamily="34" charset="-122"/>
-                <a:cs typeface="Calibri" pitchFamily="34" charset="-120"/>
-              </a:rPr>
-              <a:t>Load Shared Basket</a:t>
-            </a:r>
-            <a:endParaRPr lang="en-US" sz="1500" dirty="0"/>
-          </a:p>
-          <a:p>
-            <a:pPr algn="l" indent="0" marL="0">
-              <a:spcAft>
-                <a:spcPts val="300"/>
-              </a:spcAft>
-              <a:buNone/>
-            </a:pPr>
-            <a:r>
-              <a:rPr lang="en-US" sz="1300" dirty="0">
-                <a:solidFill>
-                  <a:srgbClr val="2B1B3D"/>
-                </a:solidFill>
-                <a:latin typeface="Calibri" pitchFamily="34" charset="0"/>
-                <a:ea typeface="Calibri" pitchFamily="34" charset="-122"/>
-                <a:cs typeface="Calibri" pitchFamily="34" charset="-120"/>
-              </a:rPr>
-              <a:t>Baskets other users have shared. Load one the same way.</a:t>
-            </a:r>
-            <a:endParaRPr lang="en-US" sz="1500" dirty="0"/>
-          </a:p>
-        </p:txBody>
-      </p:sp>
-      <p:sp>
-        <p:nvSpPr>
-          <p:cNvPr id="8" name="Text 6"/>
-          <p:cNvSpPr txBox="1"/>
-          <p:nvPr/>
-        </p:nvSpPr>
-        <p:spPr>
-          <a:xfrm>
-            <a:off x="548640" y="4434840"/>
-            <a:ext cx="4663440" cy="1143000"/>
-          </a:xfrm>
-          <a:prstGeom prst="roundRect">
-            <a:avLst>
-              <a:gd name="adj" fmla="val 8000"/>
-            </a:avLst>
-          </a:prstGeom>
-          <a:solidFill>
-            <a:srgbClr val="FCEBD2"/>
-          </a:solidFill>
-          <a:ln w="9525">
-            <a:solidFill>
-              <a:srgbClr val="D9A441"/>
-            </a:solidFill>
-          </a:ln>
-        </p:spPr>
-        <p:txBody>
-          <a:bodyPr wrap="square" lIns="101600" tIns="152400" rIns="152400" bIns="101600" rtlCol="0" anchor="t"/>
-          <a:lstStyle/>
-          <a:p>
-            <a:pPr algn="l" indent="0" marL="0">
-              <a:spcAft>
-                <a:spcPts val="300"/>
-              </a:spcAft>
-              <a:buNone/>
-            </a:pPr>
-            <a:r>
-              <a:rPr lang="en-US" sz="1500" b="1" dirty="0">
-                <a:solidFill>
-                  <a:srgbClr val="6B4A16"/>
-                </a:solidFill>
-                <a:latin typeface="Calibri" pitchFamily="34" charset="0"/>
-                <a:ea typeface="Calibri" pitchFamily="34" charset="-122"/>
-                <a:cs typeface="Calibri" pitchFamily="34" charset="-120"/>
-              </a:rPr>
-              <a:t>Download Basket</a:t>
-            </a:r>
-            <a:endParaRPr lang="en-US" sz="1500" dirty="0"/>
-          </a:p>
-          <a:p>
-            <a:pPr algn="l" indent="0" marL="0">
-              <a:spcAft>
-                <a:spcPts val="300"/>
-              </a:spcAft>
-              <a:buNone/>
-            </a:pPr>
-            <a:r>
-              <a:rPr lang="en-US" sz="1300" dirty="0">
-                <a:solidFill>
-                  <a:srgbClr val="2B1B3D"/>
-                </a:solidFill>
-                <a:latin typeface="Calibri" pitchFamily="34" charset="0"/>
-                <a:ea typeface="Calibri" pitchFamily="34" charset="-122"/>
-                <a:cs typeface="Calibri" pitchFamily="34" charset="-120"/>
-              </a:rPr>
-              <a:t>Export a saved basket for use outside Condor.</a:t>
-            </a:r>
-            <a:endParaRPr lang="en-US" sz="1500" dirty="0"/>
-          </a:p>
-        </p:txBody>
-      </p:sp>
-      <p:sp>
-        <p:nvSpPr>
-          <p:cNvPr id="9" name="Text 7"/>
-          <p:cNvSpPr txBox="1"/>
-          <p:nvPr/>
-        </p:nvSpPr>
-        <p:spPr>
-          <a:xfrm>
-            <a:off x="5605272" y="1325880"/>
-            <a:ext cx="2377440" cy="310896"/>
-          </a:xfrm>
-          <a:prstGeom prst="roundRect">
-            <a:avLst>
-              <a:gd name="adj" fmla="val 50000"/>
-            </a:avLst>
-          </a:prstGeom>
-          <a:solidFill>
-            <a:srgbClr val="DFF2E1"/>
-          </a:solidFill>
-          <a:ln w="9525">
-            <a:solidFill>
-              <a:srgbClr val="5FA873"/>
-            </a:solidFill>
-          </a:ln>
-        </p:spPr>
-        <p:txBody>
-          <a:bodyPr wrap="square" lIns="0" tIns="0" rIns="0" bIns="0" rtlCol="0" anchor="ctr"/>
-          <a:lstStyle/>
-          <a:p>
-            <a:pPr algn="ctr" indent="0" marL="0">
-              <a:buNone/>
-            </a:pPr>
-            <a:r>
-              <a:rPr lang="en-US" sz="1100" b="1" dirty="0">
-                <a:solidFill>
-                  <a:srgbClr val="205C2E"/>
-                </a:solidFill>
-                <a:latin typeface="Calibri" pitchFamily="34" charset="0"/>
-                <a:ea typeface="Calibri" pitchFamily="34" charset="-122"/>
-                <a:cs typeface="Calibri" pitchFamily="34" charset="-120"/>
-              </a:rPr>
-              <a:t>Load / Share My Basket</a:t>
-            </a:r>
-            <a:endParaRPr lang="en-US" sz="1100" dirty="0"/>
-          </a:p>
-        </p:txBody>
-      </p:sp>
-      <p:sp>
-        <p:nvSpPr>
-          <p:cNvPr id="10" name="Shape 8"/>
+          <p:cNvPr id="6" name="Shape 4"/>
           <p:cNvSpPr/>
           <p:nvPr/>
         </p:nvSpPr>
         <p:spPr>
           <a:xfrm>
-            <a:off x="5559552" y="1691640"/>
-            <a:ext cx="6126480" cy="1557281"/>
+            <a:off x="502920" y="1325880"/>
+            <a:ext cx="6766560" cy="3651504"/>
           </a:xfrm>
           <a:prstGeom prst="rect">
             <a:avLst/>
@@ -9033,7 +8865,7 @@
       </p:sp>
       <p:pic>
         <p:nvPicPr>
-          <p:cNvPr id="11" name="Image 0" descr="/home/claude/condor_deck/img/saved_list.png">    </p:cNvPr>
+          <p:cNvPr id="7" name="Image 0" descr="/home/claude/condor_deck/img/requesting_basket.png">    </p:cNvPr>
           <p:cNvPicPr>
             <a:picLocks noChangeAspect="1"/>
           </p:cNvPicPr>
@@ -9047,8 +8879,8 @@
         </p:blipFill>
         <p:spPr>
           <a:xfrm>
-            <a:off x="5605272" y="1737360"/>
-            <a:ext cx="6035040" cy="1465841"/>
+            <a:off x="548640" y="1371600"/>
+            <a:ext cx="6675120" cy="3560064"/>
           </a:xfrm>
           <a:prstGeom prst="rect">
             <a:avLst/>
@@ -9057,18 +8889,18 @@
       </p:pic>
       <p:sp>
         <p:nvSpPr>
-          <p:cNvPr id="12" name="Text 9"/>
-          <p:cNvSpPr txBox="1"/>
-          <p:nvPr/>
-        </p:nvSpPr>
-        <p:spPr>
-          <a:xfrm>
-            <a:off x="5605272" y="3477521"/>
-            <a:ext cx="2377440" cy="310896"/>
+          <p:cNvPr id="8" name="Text 5"/>
+          <p:cNvSpPr txBox="1"/>
+          <p:nvPr/>
+        </p:nvSpPr>
+        <p:spPr>
+          <a:xfrm>
+            <a:off x="7498080" y="1463040"/>
+            <a:ext cx="3776472" cy="1600200"/>
           </a:xfrm>
           <a:prstGeom prst="roundRect">
             <a:avLst>
-              <a:gd name="adj" fmla="val 50000"/>
+              <a:gd name="adj" fmla="val 5714"/>
             </a:avLst>
           </a:prstGeom>
           <a:solidFill>
@@ -9081,14 +8913,17 @@
           </a:ln>
         </p:spPr>
         <p:txBody>
-          <a:bodyPr wrap="square" lIns="0" tIns="0" rIns="0" bIns="0" rtlCol="0" anchor="ctr"/>
-          <a:lstStyle/>
-          <a:p>
-            <a:pPr algn="ctr" indent="0" marL="0">
-              <a:buNone/>
-            </a:pPr>
-            <a:r>
-              <a:rPr lang="en-US" sz="1100" b="1" dirty="0">
+          <a:bodyPr wrap="square" lIns="101600" tIns="152400" rIns="152400" bIns="101600" rtlCol="0" anchor="t"/>
+          <a:lstStyle/>
+          <a:p>
+            <a:pPr algn="l" indent="0" marL="0">
+              <a:spcAft>
+                <a:spcPts val="300"/>
+              </a:spcAft>
+              <a:buNone/>
+            </a:pPr>
+            <a:r>
+              <a:rPr lang="en-US" sz="1500" b="1" dirty="0">
                 <a:solidFill>
                   <a:srgbClr val="1D3E66"/>
                 </a:solidFill>
@@ -9096,68 +8931,152 @@
                 <a:ea typeface="Calibri" pitchFamily="34" charset="-122"/>
                 <a:cs typeface="Calibri" pitchFamily="34" charset="-120"/>
               </a:rPr>
-              <a:t>After loading a basket</a:t>
-            </a:r>
-            <a:endParaRPr lang="en-US" sz="1100" dirty="0"/>
-          </a:p>
-        </p:txBody>
-      </p:sp>
-      <p:sp>
-        <p:nvSpPr>
-          <p:cNvPr id="13" name="Shape 10"/>
-          <p:cNvSpPr/>
-          <p:nvPr/>
-        </p:nvSpPr>
-        <p:spPr>
-          <a:xfrm>
-            <a:off x="5559552" y="3843281"/>
-            <a:ext cx="6126480" cy="2259047"/>
-          </a:xfrm>
-          <a:prstGeom prst="rect">
-            <a:avLst/>
-          </a:prstGeom>
-          <a:solidFill>
-            <a:srgbClr val="FFFFFF"/>
+              <a:t>New to this?</a:t>
+            </a:r>
+            <a:endParaRPr lang="en-US" sz="1500" dirty="0"/>
+          </a:p>
+          <a:p>
+            <a:pPr algn="l" indent="0" marL="0">
+              <a:spcAft>
+                <a:spcPts val="300"/>
+              </a:spcAft>
+              <a:buNone/>
+            </a:pPr>
+            <a:r>
+              <a:rPr lang="en-US" sz="1300" dirty="0">
+                <a:solidFill>
+                  <a:srgbClr val="2B1B3D"/>
+                </a:solidFill>
+                <a:latin typeface="Calibri" pitchFamily="34" charset="0"/>
+                <a:ea typeface="Calibri" pitchFamily="34" charset="-122"/>
+                <a:cs typeface="Calibri" pitchFamily="34" charset="-120"/>
+              </a:rPr>
+              <a:t>Still exploring? Use the Data Access Request Form to start a new proposal.</a:t>
+            </a:r>
+            <a:endParaRPr lang="en-US" sz="1500" dirty="0"/>
+          </a:p>
+        </p:txBody>
+      </p:sp>
+      <p:sp>
+        <p:nvSpPr>
+          <p:cNvPr id="9" name="Text 6"/>
+          <p:cNvSpPr txBox="1"/>
+          <p:nvPr/>
+        </p:nvSpPr>
+        <p:spPr>
+          <a:xfrm>
+            <a:off x="7498080" y="3200400"/>
+            <a:ext cx="3776472" cy="1600200"/>
+          </a:xfrm>
+          <a:prstGeom prst="roundRect">
+            <a:avLst>
+              <a:gd name="adj" fmla="val 5714"/>
+            </a:avLst>
+          </a:prstGeom>
+          <a:solidFill>
+            <a:srgbClr val="DFF2E1"/>
           </a:solidFill>
           <a:ln w="9525">
             <a:solidFill>
-              <a:srgbClr val="D9CFE8"/>
+              <a:srgbClr val="5FA873"/>
             </a:solidFill>
-            <a:prstDash val="solid"/>
           </a:ln>
-          <a:effectLst>
-            <a:outerShdw sx="100000" sy="100000" kx="0" ky="0" algn="bl" rotWithShape="0" blurRad="76200" dist="25400" dir="5400000">
-              <a:srgbClr val="000000">
-                <a:alpha val="14000"/>
-              </a:srgbClr>
-            </a:outerShdw>
-          </a:effectLst>
-        </p:spPr>
-      </p:sp>
-      <p:pic>
-        <p:nvPicPr>
-          <p:cNvPr id="14" name="Image 1" descr="/home/claude/condor_deck/img/loaded.png">    </p:cNvPr>
-          <p:cNvPicPr>
-            <a:picLocks noChangeAspect="1"/>
-          </p:cNvPicPr>
-          <p:nvPr/>
-        </p:nvPicPr>
-        <p:blipFill>
-          <a:blip r:embed="rId2"/>
-          <a:stretch>
-            <a:fillRect/>
-          </a:stretch>
-        </p:blipFill>
-        <p:spPr>
-          <a:xfrm>
-            <a:off x="5605272" y="3889001"/>
-            <a:ext cx="6035040" cy="2167607"/>
-          </a:xfrm>
-          <a:prstGeom prst="rect">
-            <a:avLst/>
-          </a:prstGeom>
-        </p:spPr>
-      </p:pic>
+        </p:spPr>
+        <p:txBody>
+          <a:bodyPr wrap="square" lIns="101600" tIns="152400" rIns="152400" bIns="101600" rtlCol="0" anchor="t"/>
+          <a:lstStyle/>
+          <a:p>
+            <a:pPr algn="l" indent="0" marL="0">
+              <a:spcAft>
+                <a:spcPts val="300"/>
+              </a:spcAft>
+              <a:buNone/>
+            </a:pPr>
+            <a:r>
+              <a:rPr lang="en-US" sz="1500" b="1" dirty="0">
+                <a:solidFill>
+                  <a:srgbClr val="205C2E"/>
+                </a:solidFill>
+                <a:latin typeface="Calibri" pitchFamily="34" charset="0"/>
+                <a:ea typeface="Calibri" pitchFamily="34" charset="-122"/>
+                <a:cs typeface="Calibri" pitchFamily="34" charset="-120"/>
+              </a:rPr>
+              <a:t>Already approved?</a:t>
+            </a:r>
+            <a:endParaRPr lang="en-US" sz="1500" dirty="0"/>
+          </a:p>
+          <a:p>
+            <a:pPr algn="l" indent="0" marL="0">
+              <a:spcAft>
+                <a:spcPts val="300"/>
+              </a:spcAft>
+              <a:buNone/>
+            </a:pPr>
+            <a:r>
+              <a:rPr lang="en-US" sz="1300" dirty="0">
+                <a:solidFill>
+                  <a:srgbClr val="2B1B3D"/>
+                </a:solidFill>
+                <a:latin typeface="Calibri" pitchFamily="34" charset="0"/>
+                <a:ea typeface="Calibri" pitchFamily="34" charset="-122"/>
+                <a:cs typeface="Calibri" pitchFamily="34" charset="-120"/>
+              </a:rPr>
+              <a:t>Use Additional Users / Data Request to add this basket to an existing project.</a:t>
+            </a:r>
+            <a:endParaRPr lang="en-US" sz="1500" dirty="0"/>
+          </a:p>
+        </p:txBody>
+      </p:sp>
+      <p:sp>
+        <p:nvSpPr>
+          <p:cNvPr id="10" name="Text 7"/>
+          <p:cNvSpPr txBox="1"/>
+          <p:nvPr/>
+        </p:nvSpPr>
+        <p:spPr>
+          <a:xfrm>
+            <a:off x="548640" y="5212080"/>
+            <a:ext cx="11091672" cy="685800"/>
+          </a:xfrm>
+          <a:prstGeom prst="roundRect">
+            <a:avLst>
+              <a:gd name="adj" fmla="val 13333"/>
+            </a:avLst>
+          </a:prstGeom>
+          <a:solidFill>
+            <a:srgbClr val="FCEBD2"/>
+          </a:solidFill>
+          <a:ln w="9525">
+            <a:solidFill>
+              <a:srgbClr val="D9A441"/>
+            </a:solidFill>
+          </a:ln>
+        </p:spPr>
+        <p:txBody>
+          <a:bodyPr wrap="square" lIns="101600" tIns="152400" rIns="152400" bIns="101600" rtlCol="0" anchor="ctr"/>
+          <a:lstStyle/>
+          <a:p>
+            <a:pPr algn="l" indent="0" marL="0">
+              <a:spcAft>
+                <a:spcPts val="300"/>
+              </a:spcAft>
+              <a:buNone/>
+            </a:pPr>
+            <a:r>
+              <a:rPr lang="en-US" sz="1300" dirty="0">
+                <a:solidFill>
+                  <a:srgbClr val="2B1B3D"/>
+                </a:solidFill>
+                <a:latin typeface="Calibri" pitchFamily="34" charset="0"/>
+                <a:ea typeface="Calibri" pitchFamily="34" charset="-122"/>
+                <a:cs typeface="Calibri" pitchFamily="34" charset="-120"/>
+              </a:rPr>
+              <a:t>Found at the end of the OWL menu, and linked directly from the basket-saved confirmation page.</a:t>
+            </a:r>
+            <a:endParaRPr lang="en-US" sz="1300" dirty="0"/>
+          </a:p>
+        </p:txBody>
+      </p:sp>
     </p:spTree>
   </p:cSld>
   <p:clrMapOvr>
@@ -9960,7 +9879,7 @@
                 <a:ea typeface="Cambria" pitchFamily="34" charset="-122"/>
                 <a:cs typeface="Cambria" pitchFamily="34" charset="-120"/>
               </a:rPr>
-              <a:t>Restricted variables</a:t>
+              <a:t>Loading, sharing and downloading</a:t>
             </a:r>
             <a:endParaRPr lang="en-US" sz="3000" dirty="0"/>
           </a:p>
@@ -10046,14 +9965,271 @@
       </p:sp>
       <p:sp>
         <p:nvSpPr>
-          <p:cNvPr id="6" name="Shape 4"/>
+          <p:cNvPr id="6" name="Text 4"/>
+          <p:cNvSpPr txBox="1"/>
+          <p:nvPr/>
+        </p:nvSpPr>
+        <p:spPr>
+          <a:xfrm>
+            <a:off x="548640" y="1371600"/>
+            <a:ext cx="4663440" cy="1554480"/>
+          </a:xfrm>
+          <a:prstGeom prst="roundRect">
+            <a:avLst>
+              <a:gd name="adj" fmla="val 5882"/>
+            </a:avLst>
+          </a:prstGeom>
+          <a:solidFill>
+            <a:srgbClr val="DFF2E1"/>
+          </a:solidFill>
+          <a:ln w="9525">
+            <a:solidFill>
+              <a:srgbClr val="5FA873"/>
+            </a:solidFill>
+          </a:ln>
+        </p:spPr>
+        <p:txBody>
+          <a:bodyPr wrap="square" lIns="101600" tIns="152400" rIns="152400" bIns="101600" rtlCol="0" anchor="t"/>
+          <a:lstStyle/>
+          <a:p>
+            <a:pPr algn="l" indent="0" marL="0">
+              <a:spcAft>
+                <a:spcPts val="300"/>
+              </a:spcAft>
+              <a:buNone/>
+            </a:pPr>
+            <a:r>
+              <a:rPr lang="en-US" sz="1500" b="1" dirty="0">
+                <a:solidFill>
+                  <a:srgbClr val="205C2E"/>
+                </a:solidFill>
+                <a:latin typeface="Calibri" pitchFamily="34" charset="0"/>
+                <a:ea typeface="Calibri" pitchFamily="34" charset="-122"/>
+                <a:cs typeface="Calibri" pitchFamily="34" charset="-120"/>
+              </a:rPr>
+              <a:t>Load / Share My Basket</a:t>
+            </a:r>
+            <a:endParaRPr lang="en-US" sz="1500" dirty="0"/>
+          </a:p>
+          <a:p>
+            <a:pPr algn="l" indent="0" marL="0">
+              <a:spcAft>
+                <a:spcPts val="300"/>
+              </a:spcAft>
+              <a:buNone/>
+            </a:pPr>
+            <a:r>
+              <a:rPr lang="en-US" sz="1300" dirty="0">
+                <a:solidFill>
+                  <a:srgbClr val="2B1B3D"/>
+                </a:solidFill>
+                <a:latin typeface="Calibri" pitchFamily="34" charset="0"/>
+                <a:ea typeface="Calibri" pitchFamily="34" charset="-122"/>
+                <a:cs typeface="Calibri" pitchFamily="34" charset="-120"/>
+              </a:rPr>
+              <a:t>Your saved baskets, newest first. Select one to load it into your working basket, or share it with other users.</a:t>
+            </a:r>
+            <a:endParaRPr lang="en-US" sz="1500" dirty="0"/>
+          </a:p>
+        </p:txBody>
+      </p:sp>
+      <p:sp>
+        <p:nvSpPr>
+          <p:cNvPr id="7" name="Text 5"/>
+          <p:cNvSpPr txBox="1"/>
+          <p:nvPr/>
+        </p:nvSpPr>
+        <p:spPr>
+          <a:xfrm>
+            <a:off x="548640" y="3108960"/>
+            <a:ext cx="4663440" cy="1143000"/>
+          </a:xfrm>
+          <a:prstGeom prst="roundRect">
+            <a:avLst>
+              <a:gd name="adj" fmla="val 8000"/>
+            </a:avLst>
+          </a:prstGeom>
+          <a:solidFill>
+            <a:srgbClr val="DCE8F7"/>
+          </a:solidFill>
+          <a:ln w="9525">
+            <a:solidFill>
+              <a:srgbClr val="5B84B5"/>
+            </a:solidFill>
+          </a:ln>
+        </p:spPr>
+        <p:txBody>
+          <a:bodyPr wrap="square" lIns="101600" tIns="152400" rIns="152400" bIns="101600" rtlCol="0" anchor="t"/>
+          <a:lstStyle/>
+          <a:p>
+            <a:pPr algn="l" indent="0" marL="0">
+              <a:spcAft>
+                <a:spcPts val="300"/>
+              </a:spcAft>
+              <a:buNone/>
+            </a:pPr>
+            <a:r>
+              <a:rPr lang="en-US" sz="1500" b="1" dirty="0">
+                <a:solidFill>
+                  <a:srgbClr val="1D3E66"/>
+                </a:solidFill>
+                <a:latin typeface="Calibri" pitchFamily="34" charset="0"/>
+                <a:ea typeface="Calibri" pitchFamily="34" charset="-122"/>
+                <a:cs typeface="Calibri" pitchFamily="34" charset="-120"/>
+              </a:rPr>
+              <a:t>Load Shared Basket</a:t>
+            </a:r>
+            <a:endParaRPr lang="en-US" sz="1500" dirty="0"/>
+          </a:p>
+          <a:p>
+            <a:pPr algn="l" indent="0" marL="0">
+              <a:spcAft>
+                <a:spcPts val="300"/>
+              </a:spcAft>
+              <a:buNone/>
+            </a:pPr>
+            <a:r>
+              <a:rPr lang="en-US" sz="1300" dirty="0">
+                <a:solidFill>
+                  <a:srgbClr val="2B1B3D"/>
+                </a:solidFill>
+                <a:latin typeface="Calibri" pitchFamily="34" charset="0"/>
+                <a:ea typeface="Calibri" pitchFamily="34" charset="-122"/>
+                <a:cs typeface="Calibri" pitchFamily="34" charset="-120"/>
+              </a:rPr>
+              <a:t>Baskets other users have shared. Load one the same way.</a:t>
+            </a:r>
+            <a:endParaRPr lang="en-US" sz="1500" dirty="0"/>
+          </a:p>
+        </p:txBody>
+      </p:sp>
+      <p:sp>
+        <p:nvSpPr>
+          <p:cNvPr id="8" name="Text 6"/>
+          <p:cNvSpPr txBox="1"/>
+          <p:nvPr/>
+        </p:nvSpPr>
+        <p:spPr>
+          <a:xfrm>
+            <a:off x="548640" y="4434840"/>
+            <a:ext cx="4663440" cy="1143000"/>
+          </a:xfrm>
+          <a:prstGeom prst="roundRect">
+            <a:avLst>
+              <a:gd name="adj" fmla="val 8000"/>
+            </a:avLst>
+          </a:prstGeom>
+          <a:solidFill>
+            <a:srgbClr val="FCEBD2"/>
+          </a:solidFill>
+          <a:ln w="9525">
+            <a:solidFill>
+              <a:srgbClr val="D9A441"/>
+            </a:solidFill>
+          </a:ln>
+        </p:spPr>
+        <p:txBody>
+          <a:bodyPr wrap="square" lIns="101600" tIns="152400" rIns="152400" bIns="101600" rtlCol="0" anchor="t"/>
+          <a:lstStyle/>
+          <a:p>
+            <a:pPr algn="l" indent="0" marL="0">
+              <a:spcAft>
+                <a:spcPts val="300"/>
+              </a:spcAft>
+              <a:buNone/>
+            </a:pPr>
+            <a:r>
+              <a:rPr lang="en-US" sz="1500" b="1" dirty="0">
+                <a:solidFill>
+                  <a:srgbClr val="6B4A16"/>
+                </a:solidFill>
+                <a:latin typeface="Calibri" pitchFamily="34" charset="0"/>
+                <a:ea typeface="Calibri" pitchFamily="34" charset="-122"/>
+                <a:cs typeface="Calibri" pitchFamily="34" charset="-120"/>
+              </a:rPr>
+              <a:t>Download Basket</a:t>
+            </a:r>
+            <a:endParaRPr lang="en-US" sz="1500" dirty="0"/>
+          </a:p>
+          <a:p>
+            <a:pPr algn="l" indent="0" marL="0">
+              <a:spcAft>
+                <a:spcPts val="300"/>
+              </a:spcAft>
+              <a:buNone/>
+            </a:pPr>
+            <a:r>
+              <a:rPr lang="en-US" sz="1300" dirty="0">
+                <a:solidFill>
+                  <a:srgbClr val="2B1B3D"/>
+                </a:solidFill>
+                <a:latin typeface="Calibri" pitchFamily="34" charset="0"/>
+                <a:ea typeface="Calibri" pitchFamily="34" charset="-122"/>
+                <a:cs typeface="Calibri" pitchFamily="34" charset="-120"/>
+              </a:rPr>
+              <a:t>Export a saved basket for use outside Condor.</a:t>
+            </a:r>
+            <a:endParaRPr lang="en-US" sz="1500" dirty="0"/>
+          </a:p>
+        </p:txBody>
+      </p:sp>
+      <p:sp>
+        <p:nvSpPr>
+          <p:cNvPr id="9" name="Text 7"/>
+          <p:cNvSpPr txBox="1"/>
+          <p:nvPr/>
+        </p:nvSpPr>
+        <p:spPr>
+          <a:xfrm>
+            <a:off x="5605272" y="1325880"/>
+            <a:ext cx="2377440" cy="310896"/>
+          </a:xfrm>
+          <a:prstGeom prst="roundRect">
+            <a:avLst>
+              <a:gd name="adj" fmla="val 50000"/>
+            </a:avLst>
+          </a:prstGeom>
+          <a:solidFill>
+            <a:srgbClr val="DFF2E1"/>
+          </a:solidFill>
+          <a:ln w="9525">
+            <a:solidFill>
+              <a:srgbClr val="5FA873"/>
+            </a:solidFill>
+          </a:ln>
+        </p:spPr>
+        <p:txBody>
+          <a:bodyPr wrap="square" lIns="0" tIns="0" rIns="0" bIns="0" rtlCol="0" anchor="ctr"/>
+          <a:lstStyle/>
+          <a:p>
+            <a:pPr algn="ctr" indent="0" marL="0">
+              <a:buNone/>
+            </a:pPr>
+            <a:r>
+              <a:rPr lang="en-US" sz="1100" b="1" dirty="0">
+                <a:solidFill>
+                  <a:srgbClr val="205C2E"/>
+                </a:solidFill>
+                <a:latin typeface="Calibri" pitchFamily="34" charset="0"/>
+                <a:ea typeface="Calibri" pitchFamily="34" charset="-122"/>
+                <a:cs typeface="Calibri" pitchFamily="34" charset="-120"/>
+              </a:rPr>
+              <a:t>Load / Share My Basket</a:t>
+            </a:r>
+            <a:endParaRPr lang="en-US" sz="1100" dirty="0"/>
+          </a:p>
+        </p:txBody>
+      </p:sp>
+      <p:sp>
+        <p:nvSpPr>
+          <p:cNvPr id="10" name="Shape 8"/>
           <p:cNvSpPr/>
           <p:nvPr/>
         </p:nvSpPr>
         <p:spPr>
           <a:xfrm>
-            <a:off x="502920" y="1417320"/>
-            <a:ext cx="7040880" cy="2043902"/>
+            <a:off x="5559552" y="1691640"/>
+            <a:ext cx="6126480" cy="1557281"/>
           </a:xfrm>
           <a:prstGeom prst="rect">
             <a:avLst/>
@@ -10078,7 +10254,7 @@
       </p:sp>
       <p:pic>
         <p:nvPicPr>
-          <p:cNvPr id="7" name="Image 0" descr="/home/claude/condor_deck/img/restricted.png">    </p:cNvPr>
+          <p:cNvPr id="11" name="Image 0" descr="/home/claude/condor_deck/img/saved_list.png">    </p:cNvPr>
           <p:cNvPicPr>
             <a:picLocks noChangeAspect="1"/>
           </p:cNvPicPr>
@@ -10092,17 +10268,96 @@
         </p:blipFill>
         <p:spPr>
           <a:xfrm>
-            <a:off x="548640" y="1463040"/>
-            <a:ext cx="6949440" cy="1952462"/>
+            <a:off x="5605272" y="1737360"/>
+            <a:ext cx="6035040" cy="1465841"/>
           </a:xfrm>
           <a:prstGeom prst="rect">
             <a:avLst/>
           </a:prstGeom>
         </p:spPr>
       </p:pic>
+      <p:sp>
+        <p:nvSpPr>
+          <p:cNvPr id="12" name="Text 9"/>
+          <p:cNvSpPr txBox="1"/>
+          <p:nvPr/>
+        </p:nvSpPr>
+        <p:spPr>
+          <a:xfrm>
+            <a:off x="5605272" y="3477521"/>
+            <a:ext cx="2377440" cy="310896"/>
+          </a:xfrm>
+          <a:prstGeom prst="roundRect">
+            <a:avLst>
+              <a:gd name="adj" fmla="val 50000"/>
+            </a:avLst>
+          </a:prstGeom>
+          <a:solidFill>
+            <a:srgbClr val="DCE8F7"/>
+          </a:solidFill>
+          <a:ln w="9525">
+            <a:solidFill>
+              <a:srgbClr val="5B84B5"/>
+            </a:solidFill>
+          </a:ln>
+        </p:spPr>
+        <p:txBody>
+          <a:bodyPr wrap="square" lIns="0" tIns="0" rIns="0" bIns="0" rtlCol="0" anchor="ctr"/>
+          <a:lstStyle/>
+          <a:p>
+            <a:pPr algn="ctr" indent="0" marL="0">
+              <a:buNone/>
+            </a:pPr>
+            <a:r>
+              <a:rPr lang="en-US" sz="1100" b="1" dirty="0">
+                <a:solidFill>
+                  <a:srgbClr val="1D3E66"/>
+                </a:solidFill>
+                <a:latin typeface="Calibri" pitchFamily="34" charset="0"/>
+                <a:ea typeface="Calibri" pitchFamily="34" charset="-122"/>
+                <a:cs typeface="Calibri" pitchFamily="34" charset="-120"/>
+              </a:rPr>
+              <a:t>After loading a basket</a:t>
+            </a:r>
+            <a:endParaRPr lang="en-US" sz="1100" dirty="0"/>
+          </a:p>
+        </p:txBody>
+      </p:sp>
+      <p:sp>
+        <p:nvSpPr>
+          <p:cNvPr id="13" name="Shape 10"/>
+          <p:cNvSpPr/>
+          <p:nvPr/>
+        </p:nvSpPr>
+        <p:spPr>
+          <a:xfrm>
+            <a:off x="5559552" y="3843281"/>
+            <a:ext cx="6126480" cy="2259047"/>
+          </a:xfrm>
+          <a:prstGeom prst="rect">
+            <a:avLst/>
+          </a:prstGeom>
+          <a:solidFill>
+            <a:srgbClr val="FFFFFF"/>
+          </a:solidFill>
+          <a:ln w="9525">
+            <a:solidFill>
+              <a:srgbClr val="D9CFE8"/>
+            </a:solidFill>
+            <a:prstDash val="solid"/>
+          </a:ln>
+          <a:effectLst>
+            <a:outerShdw sx="100000" sy="100000" kx="0" ky="0" algn="bl" rotWithShape="0" blurRad="76200" dist="25400" dir="5400000">
+              <a:srgbClr val="000000">
+                <a:alpha val="14000"/>
+              </a:srgbClr>
+            </a:outerShdw>
+          </a:effectLst>
+        </p:spPr>
+      </p:sp>
       <p:pic>
         <p:nvPicPr>
-          <p:cNvPr id="8" name="Image 1" descr="/home/claude/condor_deck/img/lock.png">    </p:cNvPr>
+          <p:cNvPr id="14" name="Image 1" descr="/home/claude/condor_deck/img/loaded.png">    </p:cNvPr>
           <p:cNvPicPr>
             <a:picLocks noChangeAspect="1"/>
           </p:cNvPicPr>
@@ -10116,294 +10371,14 @@
         </p:blipFill>
         <p:spPr>
           <a:xfrm>
-            <a:off x="731520" y="3872702"/>
-            <a:ext cx="640080" cy="920115"/>
+            <a:off x="5605272" y="3889001"/>
+            <a:ext cx="6035040" cy="2167607"/>
           </a:xfrm>
           <a:prstGeom prst="rect">
             <a:avLst/>
           </a:prstGeom>
         </p:spPr>
       </p:pic>
-      <p:sp>
-        <p:nvSpPr>
-          <p:cNvPr id="9" name="Text 5"/>
-          <p:cNvSpPr txBox="1"/>
-          <p:nvPr/>
-        </p:nvSpPr>
-        <p:spPr>
-          <a:xfrm>
-            <a:off x="1554480" y="3781262"/>
-            <a:ext cx="5943600" cy="1463040"/>
-          </a:xfrm>
-          <a:prstGeom prst="roundRect">
-            <a:avLst>
-              <a:gd name="adj" fmla="val 6250"/>
-            </a:avLst>
-          </a:prstGeom>
-          <a:solidFill>
-            <a:srgbClr val="F7DDE6"/>
-          </a:solidFill>
-          <a:ln w="9525">
-            <a:solidFill>
-              <a:srgbClr val="C2547D"/>
-            </a:solidFill>
-          </a:ln>
-        </p:spPr>
-        <p:txBody>
-          <a:bodyPr wrap="square" lIns="101600" tIns="152400" rIns="152400" bIns="101600" rtlCol="0" anchor="ctr"/>
-          <a:lstStyle/>
-          <a:p>
-            <a:pPr algn="l" indent="0" marL="0">
-              <a:spcAft>
-                <a:spcPts val="300"/>
-              </a:spcAft>
-              <a:buNone/>
-            </a:pPr>
-            <a:r>
-              <a:rPr lang="en-US" sz="1500" b="1" dirty="0">
-                <a:solidFill>
-                  <a:srgbClr val="6B1F3B"/>
-                </a:solidFill>
-                <a:latin typeface="Calibri" pitchFamily="34" charset="0"/>
-                <a:ea typeface="Calibri" pitchFamily="34" charset="-122"/>
-                <a:cs typeface="Calibri" pitchFamily="34" charset="-120"/>
-              </a:rPr>
-              <a:t>Never added, even as linked</a:t>
-            </a:r>
-            <a:endParaRPr lang="en-US" sz="1500" dirty="0"/>
-          </a:p>
-          <a:p>
-            <a:pPr algn="l" indent="0" marL="0">
-              <a:spcAft>
-                <a:spcPts val="300"/>
-              </a:spcAft>
-              <a:buNone/>
-            </a:pPr>
-            <a:r>
-              <a:rPr lang="en-US" sz="1300" dirty="0">
-                <a:solidFill>
-                  <a:srgbClr val="2B1B3D"/>
-                </a:solidFill>
-                <a:latin typeface="Calibri" pitchFamily="34" charset="0"/>
-                <a:ea typeface="Calibri" pitchFamily="34" charset="-122"/>
-                <a:cs typeface="Calibri" pitchFamily="34" charset="-120"/>
-              </a:rPr>
-              <a:t>Restricted variables still appear on Basket Management with the reason, so you can see what was left out.</a:t>
-            </a:r>
-            <a:endParaRPr lang="en-US" sz="1500" dirty="0"/>
-          </a:p>
-        </p:txBody>
-      </p:sp>
-      <p:sp>
-        <p:nvSpPr>
-          <p:cNvPr id="10" name="Text 6"/>
-          <p:cNvSpPr txBox="1"/>
-          <p:nvPr/>
-        </p:nvSpPr>
-        <p:spPr>
-          <a:xfrm>
-            <a:off x="7772400" y="1463040"/>
-            <a:ext cx="3867912" cy="1280160"/>
-          </a:xfrm>
-          <a:prstGeom prst="roundRect">
-            <a:avLst>
-              <a:gd name="adj" fmla="val 7143"/>
-            </a:avLst>
-          </a:prstGeom>
-          <a:solidFill>
-            <a:srgbClr val="F7DDE6"/>
-          </a:solidFill>
-          <a:ln w="9525">
-            <a:solidFill>
-              <a:srgbClr val="C2547D"/>
-            </a:solidFill>
-          </a:ln>
-        </p:spPr>
-        <p:txBody>
-          <a:bodyPr wrap="square" lIns="101600" tIns="152400" rIns="152400" bIns="101600" rtlCol="0" anchor="ctr"/>
-          <a:lstStyle/>
-          <a:p>
-            <a:pPr algn="l" indent="0" marL="0">
-              <a:spcAft>
-                <a:spcPts val="300"/>
-              </a:spcAft>
-              <a:buNone/>
-            </a:pPr>
-            <a:r>
-              <a:rPr lang="en-US" sz="1500" b="1" dirty="0">
-                <a:solidFill>
-                  <a:srgbClr val="6B1F3B"/>
-                </a:solidFill>
-                <a:latin typeface="Calibri" pitchFamily="34" charset="0"/>
-                <a:ea typeface="Calibri" pitchFamily="34" charset="-122"/>
-                <a:cs typeface="Calibri" pitchFamily="34" charset="-120"/>
-              </a:rPr>
-              <a:t>What it means</a:t>
-            </a:r>
-            <a:endParaRPr lang="en-US" sz="1500" dirty="0"/>
-          </a:p>
-          <a:p>
-            <a:pPr algn="l" indent="0" marL="0">
-              <a:spcAft>
-                <a:spcPts val="300"/>
-              </a:spcAft>
-              <a:buNone/>
-            </a:pPr>
-            <a:r>
-              <a:rPr lang="en-US" sz="1300" dirty="0">
-                <a:solidFill>
-                  <a:srgbClr val="2B1B3D"/>
-                </a:solidFill>
-                <a:latin typeface="Calibri" pitchFamily="34" charset="0"/>
-                <a:ea typeface="Calibri" pitchFamily="34" charset="-122"/>
-                <a:cs typeface="Calibri" pitchFamily="34" charset="-120"/>
-              </a:rPr>
-              <a:t>You cannot add this variable to a basket.</a:t>
-            </a:r>
-            <a:endParaRPr lang="en-US" sz="1500" dirty="0"/>
-          </a:p>
-        </p:txBody>
-      </p:sp>
-      <p:sp>
-        <p:nvSpPr>
-          <p:cNvPr id="11" name="Text 7"/>
-          <p:cNvSpPr txBox="1"/>
-          <p:nvPr/>
-        </p:nvSpPr>
-        <p:spPr>
-          <a:xfrm>
-            <a:off x="7772400" y="2926080"/>
-            <a:ext cx="3867912" cy="1280160"/>
-          </a:xfrm>
-          <a:prstGeom prst="roundRect">
-            <a:avLst>
-              <a:gd name="adj" fmla="val 7143"/>
-            </a:avLst>
-          </a:prstGeom>
-          <a:solidFill>
-            <a:srgbClr val="FCEBD2"/>
-          </a:solidFill>
-          <a:ln w="9525">
-            <a:solidFill>
-              <a:srgbClr val="D9A441"/>
-            </a:solidFill>
-          </a:ln>
-        </p:spPr>
-        <p:txBody>
-          <a:bodyPr wrap="square" lIns="101600" tIns="152400" rIns="152400" bIns="101600" rtlCol="0" anchor="ctr"/>
-          <a:lstStyle/>
-          <a:p>
-            <a:pPr algn="l" indent="0" marL="0">
-              <a:spcAft>
-                <a:spcPts val="300"/>
-              </a:spcAft>
-              <a:buNone/>
-            </a:pPr>
-            <a:r>
-              <a:rPr lang="en-US" sz="1500" b="1" dirty="0">
-                <a:solidFill>
-                  <a:srgbClr val="6B4A16"/>
-                </a:solidFill>
-                <a:latin typeface="Calibri" pitchFamily="34" charset="0"/>
-                <a:ea typeface="Calibri" pitchFamily="34" charset="-122"/>
-                <a:cs typeface="Calibri" pitchFamily="34" charset="-120"/>
-              </a:rPr>
-              <a:t>Why?</a:t>
-            </a:r>
-            <a:endParaRPr lang="en-US" sz="1500" dirty="0"/>
-          </a:p>
-          <a:p>
-            <a:pPr algn="l" indent="0" marL="0">
-              <a:spcAft>
-                <a:spcPts val="300"/>
-              </a:spcAft>
-              <a:buNone/>
-            </a:pPr>
-            <a:r>
-              <a:rPr lang="en-US" sz="1300" dirty="0">
-                <a:solidFill>
-                  <a:srgbClr val="2B1B3D"/>
-                </a:solidFill>
-                <a:latin typeface="Calibri" pitchFamily="34" charset="0"/>
-                <a:ea typeface="Calibri" pitchFamily="34" charset="-122"/>
-                <a:cs typeface="Calibri" pitchFamily="34" charset="-120"/>
-              </a:rPr>
-              <a:t>Hover over the padlock to see the reason and who to ask.</a:t>
-            </a:r>
-            <a:endParaRPr lang="en-US" sz="1500" dirty="0"/>
-          </a:p>
-        </p:txBody>
-      </p:sp>
-      <p:sp>
-        <p:nvSpPr>
-          <p:cNvPr id="12" name="Text 8"/>
-          <p:cNvSpPr txBox="1"/>
-          <p:nvPr/>
-        </p:nvSpPr>
-        <p:spPr>
-          <a:xfrm>
-            <a:off x="7772400" y="4389120"/>
-            <a:ext cx="3867912" cy="1280160"/>
-          </a:xfrm>
-          <a:prstGeom prst="roundRect">
-            <a:avLst>
-              <a:gd name="adj" fmla="val 7143"/>
-            </a:avLst>
-          </a:prstGeom>
-          <a:solidFill>
-            <a:srgbClr val="DFF2E1"/>
-          </a:solidFill>
-          <a:ln w="9525">
-            <a:solidFill>
-              <a:srgbClr val="5FA873"/>
-            </a:solidFill>
-          </a:ln>
-        </p:spPr>
-        <p:txBody>
-          <a:bodyPr wrap="square" lIns="101600" tIns="152400" rIns="152400" bIns="101600" rtlCol="0" anchor="ctr"/>
-          <a:lstStyle/>
-          <a:p>
-            <a:pPr algn="l" indent="0" marL="0">
-              <a:spcAft>
-                <a:spcPts val="300"/>
-              </a:spcAft>
-              <a:buNone/>
-            </a:pPr>
-            <a:r>
-              <a:rPr lang="en-US" sz="1500" b="1" dirty="0">
-                <a:solidFill>
-                  <a:srgbClr val="205C2E"/>
-                </a:solidFill>
-                <a:latin typeface="Calibri" pitchFamily="34" charset="0"/>
-                <a:ea typeface="Calibri" pitchFamily="34" charset="-122"/>
-                <a:cs typeface="Calibri" pitchFamily="34" charset="-120"/>
-              </a:rPr>
-              <a:t>Need access?</a:t>
-            </a:r>
-            <a:endParaRPr lang="en-US" sz="1500" dirty="0"/>
-          </a:p>
-          <a:p>
-            <a:pPr algn="l" indent="0" marL="0">
-              <a:spcAft>
-                <a:spcPts val="300"/>
-              </a:spcAft>
-              <a:buNone/>
-            </a:pPr>
-            <a:r>
-              <a:rPr lang="en-US" sz="1300" dirty="0">
-                <a:solidFill>
-                  <a:srgbClr val="2B1B3D"/>
-                </a:solidFill>
-                <a:latin typeface="Calibri" pitchFamily="34" charset="0"/>
-                <a:ea typeface="Calibri" pitchFamily="34" charset="-122"/>
-                <a:cs typeface="Calibri" pitchFamily="34" charset="-120"/>
-              </a:rPr>
-              <a:t>Contact LHA using the link in the site footer.</a:t>
-            </a:r>
-            <a:endParaRPr lang="en-US" sz="1500" dirty="0"/>
-          </a:p>
-        </p:txBody>
-      </p:sp>
     </p:spTree>
   </p:cSld>
   <p:clrMapOvr>
@@ -10516,7 +10491,7 @@
                 <a:ea typeface="Cambria" pitchFamily="34" charset="-122"/>
                 <a:cs typeface="Cambria" pitchFamily="34" charset="-120"/>
               </a:rPr>
-              <a:t>Condor and OWL</a:t>
+              <a:t>Restricted variables</a:t>
             </a:r>
             <a:endParaRPr lang="en-US" sz="3000" dirty="0"/>
           </a:p>
@@ -10602,209 +10577,39 @@
       </p:sp>
       <p:sp>
         <p:nvSpPr>
-          <p:cNvPr id="6" name="Text 4"/>
-          <p:cNvSpPr txBox="1"/>
-          <p:nvPr/>
-        </p:nvSpPr>
-        <p:spPr>
-          <a:xfrm>
-            <a:off x="548640" y="1371600"/>
-            <a:ext cx="5408676" cy="3429000"/>
-          </a:xfrm>
-          <a:prstGeom prst="roundRect">
-            <a:avLst>
-              <a:gd name="adj" fmla="val 2667"/>
-            </a:avLst>
-          </a:prstGeom>
-          <a:solidFill>
-            <a:srgbClr val="E8DFF5"/>
+          <p:cNvPr id="6" name="Shape 4"/>
+          <p:cNvSpPr/>
+          <p:nvPr/>
+        </p:nvSpPr>
+        <p:spPr>
+          <a:xfrm>
+            <a:off x="502920" y="1417320"/>
+            <a:ext cx="7040880" cy="2043902"/>
+          </a:xfrm>
+          <a:prstGeom prst="rect">
+            <a:avLst/>
+          </a:prstGeom>
+          <a:solidFill>
+            <a:srgbClr val="FFFFFF"/>
           </a:solidFill>
           <a:ln w="9525">
             <a:solidFill>
-              <a:srgbClr val="8C6BC2"/>
+              <a:srgbClr val="D9CFE8"/>
             </a:solidFill>
+            <a:prstDash val="solid"/>
           </a:ln>
-        </p:spPr>
-        <p:txBody>
-          <a:bodyPr wrap="square" lIns="101600" tIns="152400" rIns="152400" bIns="101600" rtlCol="0" anchor="t"/>
-          <a:lstStyle/>
-          <a:p>
-            <a:pPr algn="l" indent="0" marL="0">
-              <a:spcAft>
-                <a:spcPts val="300"/>
-              </a:spcAft>
-              <a:buNone/>
-            </a:pPr>
-            <a:r>
-              <a:rPr lang="en-US" sz="2000" b="1" dirty="0">
-                <a:solidFill>
-                  <a:srgbClr val="3D2463"/>
-                </a:solidFill>
-                <a:latin typeface="Calibri" pitchFamily="34" charset="0"/>
-                <a:ea typeface="Calibri" pitchFamily="34" charset="-122"/>
-                <a:cs typeface="Calibri" pitchFamily="34" charset="-120"/>
-              </a:rPr>
-              <a:t>Condor</a:t>
-            </a:r>
-            <a:endParaRPr lang="en-US" sz="2000" dirty="0"/>
-          </a:p>
-        </p:txBody>
-      </p:sp>
-      <p:sp>
-        <p:nvSpPr>
-          <p:cNvPr id="7" name="Text 5"/>
-          <p:cNvSpPr txBox="1"/>
-          <p:nvPr/>
-        </p:nvSpPr>
-        <p:spPr>
-          <a:xfrm>
-            <a:off x="777240" y="2194560"/>
-            <a:ext cx="4951476" cy="2468880"/>
-          </a:xfrm>
-          <a:prstGeom prst="rect">
-            <a:avLst/>
-          </a:prstGeom>
-          <a:noFill/>
-          <a:ln/>
-        </p:spPr>
-        <p:txBody>
-          <a:bodyPr wrap="square" lIns="0" tIns="0" rIns="0" bIns="0" rtlCol="0" anchor="t"/>
-          <a:lstStyle/>
-          <a:p>
-            <a:pPr indent="0" marL="0">
-              <a:spcAft>
-                <a:spcPts val="1400"/>
-              </a:spcAft>
-              <a:buNone/>
-            </a:pPr>
-            <a:r>
-              <a:rPr lang="en-US" sz="1700" dirty="0">
-                <a:solidFill>
-                  <a:srgbClr val="2B1B3D"/>
-                </a:solidFill>
-                <a:latin typeface="Calibri" pitchFamily="34" charset="0"/>
-                <a:ea typeface="Calibri" pitchFamily="34" charset="-122"/>
-                <a:cs typeface="Calibri" pitchFamily="34" charset="-120"/>
-              </a:rPr>
-              <a:t>✓  Search by name, keyword, category or library</a:t>
-            </a:r>
-            <a:endParaRPr lang="en-US" sz="1700" dirty="0"/>
-          </a:p>
-          <a:p>
-            <a:pPr indent="0" marL="0">
-              <a:spcAft>
-                <a:spcPts val="1400"/>
-              </a:spcAft>
-              <a:buNone/>
-            </a:pPr>
-            <a:r>
-              <a:rPr lang="en-US" sz="1700" dirty="0">
-                <a:solidFill>
-                  <a:srgbClr val="2B1B3D"/>
-                </a:solidFill>
-                <a:latin typeface="Calibri" pitchFamily="34" charset="0"/>
-                <a:ea typeface="Calibri" pitchFamily="34" charset="-122"/>
-                <a:cs typeface="Calibri" pitchFamily="34" charset="-120"/>
-              </a:rPr>
-              <a:t>✓  Build, save, load and share baskets</a:t>
-            </a:r>
-            <a:endParaRPr lang="en-US" sz="1700" dirty="0"/>
-          </a:p>
-          <a:p>
-            <a:pPr indent="0" marL="0">
-              <a:spcAft>
-                <a:spcPts val="1400"/>
-              </a:spcAft>
-              <a:buNone/>
-            </a:pPr>
-            <a:r>
-              <a:rPr lang="en-US" sz="1700" dirty="0">
-                <a:solidFill>
-                  <a:srgbClr val="2B1B3D"/>
-                </a:solidFill>
-                <a:latin typeface="Calibri" pitchFamily="34" charset="0"/>
-                <a:ea typeface="Calibri" pitchFamily="34" charset="-122"/>
-                <a:cs typeface="Calibri" pitchFamily="34" charset="-120"/>
-              </a:rPr>
-              <a:t>✓  Prepare a data request for LHA</a:t>
-            </a:r>
-            <a:endParaRPr lang="en-US" sz="1700" dirty="0"/>
-          </a:p>
-          <a:p>
-            <a:pPr indent="0" marL="0">
-              <a:spcAft>
-                <a:spcPts val="1400"/>
-              </a:spcAft>
-              <a:buNone/>
-            </a:pPr>
-            <a:r>
-              <a:rPr lang="en-US" sz="1700" dirty="0">
-                <a:solidFill>
-                  <a:srgbClr val="2B1B3D"/>
-                </a:solidFill>
-                <a:latin typeface="Calibri" pitchFamily="34" charset="0"/>
-                <a:ea typeface="Calibri" pitchFamily="34" charset="-122"/>
-                <a:cs typeface="Calibri" pitchFamily="34" charset="-120"/>
-              </a:rPr>
-              <a:t>✓  Needs an approved Condor account</a:t>
-            </a:r>
-            <a:endParaRPr lang="en-US" sz="1700" dirty="0"/>
-          </a:p>
-        </p:txBody>
-      </p:sp>
-      <p:sp>
-        <p:nvSpPr>
-          <p:cNvPr id="8" name="Text 6"/>
-          <p:cNvSpPr txBox="1"/>
-          <p:nvPr/>
-        </p:nvSpPr>
-        <p:spPr>
-          <a:xfrm>
-            <a:off x="6231636" y="1371600"/>
-            <a:ext cx="5408676" cy="3429000"/>
-          </a:xfrm>
-          <a:prstGeom prst="roundRect">
-            <a:avLst>
-              <a:gd name="adj" fmla="val 2667"/>
-            </a:avLst>
-          </a:prstGeom>
-          <a:solidFill>
-            <a:srgbClr val="D7F0EE"/>
-          </a:solidFill>
-          <a:ln w="9525">
-            <a:solidFill>
-              <a:srgbClr val="4FA69E"/>
-            </a:solidFill>
-          </a:ln>
-        </p:spPr>
-        <p:txBody>
-          <a:bodyPr wrap="square" lIns="101600" tIns="152400" rIns="152400" bIns="101600" rtlCol="0" anchor="t"/>
-          <a:lstStyle/>
-          <a:p>
-            <a:pPr algn="l" indent="0" marL="0">
-              <a:spcAft>
-                <a:spcPts val="300"/>
-              </a:spcAft>
-              <a:buNone/>
-            </a:pPr>
-            <a:r>
-              <a:rPr lang="en-US" sz="2000" b="1" dirty="0">
-                <a:solidFill>
-                  <a:srgbClr val="0F4C4A"/>
-                </a:solidFill>
-                <a:latin typeface="Calibri" pitchFamily="34" charset="0"/>
-                <a:ea typeface="Calibri" pitchFamily="34" charset="-122"/>
-                <a:cs typeface="Calibri" pitchFamily="34" charset="-120"/>
-              </a:rPr>
-              <a:t>OWL</a:t>
-            </a:r>
-            <a:endParaRPr lang="en-US" sz="2000" dirty="0"/>
-          </a:p>
-        </p:txBody>
+          <a:effectLst>
+            <a:outerShdw sx="100000" sy="100000" kx="0" ky="0" algn="bl" rotWithShape="0" blurRad="76200" dist="25400" dir="5400000">
+              <a:srgbClr val="000000">
+                <a:alpha val="14000"/>
+              </a:srgbClr>
+            </a:outerShdw>
+          </a:effectLst>
+        </p:spPr>
       </p:sp>
       <p:pic>
         <p:nvPicPr>
-          <p:cNvPr id="9" name="Image 0" descr="/home/claude/condor_deck/img/owl.png">    </p:cNvPr>
+          <p:cNvPr id="7" name="Image 0" descr="/home/claude/condor_deck/img/restricted.png">    </p:cNvPr>
           <p:cNvPicPr>
             <a:picLocks noChangeAspect="1"/>
           </p:cNvPicPr>
@@ -10818,138 +10623,60 @@
         </p:blipFill>
         <p:spPr>
           <a:xfrm>
-            <a:off x="10771632" y="1508760"/>
-            <a:ext cx="548640" cy="752785"/>
+            <a:off x="548640" y="1463040"/>
+            <a:ext cx="6949440" cy="1952462"/>
           </a:xfrm>
           <a:prstGeom prst="rect">
             <a:avLst/>
           </a:prstGeom>
         </p:spPr>
       </p:pic>
-      <p:sp>
-        <p:nvSpPr>
-          <p:cNvPr id="10" name="Text 7"/>
-          <p:cNvSpPr txBox="1"/>
-          <p:nvPr/>
-        </p:nvSpPr>
-        <p:spPr>
-          <a:xfrm>
-            <a:off x="6460236" y="2194560"/>
-            <a:ext cx="4951476" cy="2468880"/>
+      <p:pic>
+        <p:nvPicPr>
+          <p:cNvPr id="8" name="Image 1" descr="/home/claude/condor_deck/img/lock.png">    </p:cNvPr>
+          <p:cNvPicPr>
+            <a:picLocks noChangeAspect="1"/>
+          </p:cNvPicPr>
+          <p:nvPr/>
+        </p:nvPicPr>
+        <p:blipFill>
+          <a:blip r:embed="rId2"/>
+          <a:stretch>
+            <a:fillRect/>
+          </a:stretch>
+        </p:blipFill>
+        <p:spPr>
+          <a:xfrm>
+            <a:off x="731520" y="3872702"/>
+            <a:ext cx="640080" cy="920115"/>
           </a:xfrm>
           <a:prstGeom prst="rect">
             <a:avLst/>
           </a:prstGeom>
-          <a:noFill/>
-          <a:ln/>
-        </p:spPr>
-        <p:txBody>
-          <a:bodyPr wrap="square" lIns="0" tIns="0" rIns="0" bIns="0" rtlCol="0" anchor="t"/>
-          <a:lstStyle/>
-          <a:p>
-            <a:pPr indent="0" marL="0">
-              <a:spcAft>
-                <a:spcPts val="1400"/>
-              </a:spcAft>
-              <a:buNone/>
-            </a:pPr>
-            <a:r>
-              <a:rPr lang="en-US" sz="1700" dirty="0">
-                <a:solidFill>
-                  <a:srgbClr val="2B1B3D"/>
-                </a:solidFill>
-                <a:latin typeface="Calibri" pitchFamily="34" charset="0"/>
-                <a:ea typeface="Calibri" pitchFamily="34" charset="-122"/>
-                <a:cs typeface="Calibri" pitchFamily="34" charset="-120"/>
-              </a:rPr>
-              <a:t>✓  Public metadata platform</a:t>
-            </a:r>
-            <a:endParaRPr lang="en-US" sz="1700" dirty="0"/>
-          </a:p>
-          <a:p>
-            <a:pPr indent="0" marL="0">
-              <a:spcAft>
-                <a:spcPts val="1400"/>
-              </a:spcAft>
-              <a:buNone/>
-            </a:pPr>
-            <a:r>
-              <a:rPr lang="en-US" sz="1700" dirty="0">
-                <a:solidFill>
-                  <a:srgbClr val="2B1B3D"/>
-                </a:solidFill>
-                <a:latin typeface="Calibri" pitchFamily="34" charset="0"/>
-                <a:ea typeface="Calibri" pitchFamily="34" charset="-122"/>
-                <a:cs typeface="Calibri" pitchFamily="34" charset="-120"/>
-              </a:rPr>
-              <a:t>✓  No Condor account needed</a:t>
-            </a:r>
-            <a:endParaRPr lang="en-US" sz="1700" dirty="0"/>
-          </a:p>
-          <a:p>
-            <a:pPr indent="0" marL="0">
-              <a:spcAft>
-                <a:spcPts val="1400"/>
-              </a:spcAft>
-              <a:buNone/>
-            </a:pPr>
-            <a:r>
-              <a:rPr lang="en-US" sz="1700" dirty="0">
-                <a:solidFill>
-                  <a:srgbClr val="2B1B3D"/>
-                </a:solidFill>
-                <a:latin typeface="Calibri" pitchFamily="34" charset="0"/>
-                <a:ea typeface="Calibri" pitchFamily="34" charset="-122"/>
-                <a:cs typeface="Calibri" pitchFamily="34" charset="-120"/>
-              </a:rPr>
-              <a:t>✓  Guided walkthrough for first-time users</a:t>
-            </a:r>
-            <a:endParaRPr lang="en-US" sz="1700" dirty="0"/>
-          </a:p>
-          <a:p>
-            <a:pPr indent="0" marL="0">
-              <a:spcAft>
-                <a:spcPts val="1400"/>
-              </a:spcAft>
-              <a:buNone/>
-            </a:pPr>
-            <a:r>
-              <a:rPr lang="en-US" sz="1700" dirty="0">
-                <a:solidFill>
-                  <a:srgbClr val="2B1B3D"/>
-                </a:solidFill>
-                <a:latin typeface="Calibri" pitchFamily="34" charset="0"/>
-                <a:ea typeface="Calibri" pitchFamily="34" charset="-122"/>
-                <a:cs typeface="Calibri" pitchFamily="34" charset="-120"/>
-              </a:rPr>
-              <a:t>✓  The owl icon in Condor links straight to a variable's OWL page</a:t>
-            </a:r>
-            <a:endParaRPr lang="en-US" sz="1700" dirty="0"/>
-          </a:p>
-        </p:txBody>
-      </p:sp>
-      <p:sp>
-        <p:nvSpPr>
-          <p:cNvPr id="11" name="Text 8"/>
-          <p:cNvSpPr txBox="1"/>
-          <p:nvPr/>
-        </p:nvSpPr>
-        <p:spPr>
-          <a:xfrm>
-            <a:off x="548640" y="5120640"/>
-            <a:ext cx="11091672" cy="640080"/>
+        </p:spPr>
+      </p:pic>
+      <p:sp>
+        <p:nvSpPr>
+          <p:cNvPr id="9" name="Text 5"/>
+          <p:cNvSpPr txBox="1"/>
+          <p:nvPr/>
+        </p:nvSpPr>
+        <p:spPr>
+          <a:xfrm>
+            <a:off x="1554480" y="3781262"/>
+            <a:ext cx="5943600" cy="1463040"/>
           </a:xfrm>
           <a:prstGeom prst="roundRect">
             <a:avLst>
-              <a:gd name="adj" fmla="val 14286"/>
+              <a:gd name="adj" fmla="val 6250"/>
             </a:avLst>
           </a:prstGeom>
           <a:solidFill>
-            <a:srgbClr val="DCE8F7"/>
+            <a:srgbClr val="F7DDE6"/>
           </a:solidFill>
           <a:ln w="9525">
             <a:solidFill>
-              <a:srgbClr val="5B84B5"/>
+              <a:srgbClr val="C2547D"/>
             </a:solidFill>
           </a:ln>
         </p:spPr>
@@ -10964,6 +10691,26 @@
               <a:buNone/>
             </a:pPr>
             <a:r>
+              <a:rPr lang="en-US" sz="1500" b="1" dirty="0">
+                <a:solidFill>
+                  <a:srgbClr val="6B1F3B"/>
+                </a:solidFill>
+                <a:latin typeface="Calibri" pitchFamily="34" charset="0"/>
+                <a:ea typeface="Calibri" pitchFamily="34" charset="-122"/>
+                <a:cs typeface="Calibri" pitchFamily="34" charset="-120"/>
+              </a:rPr>
+              <a:t>Never added, even as linked</a:t>
+            </a:r>
+            <a:endParaRPr lang="en-US" sz="1500" dirty="0"/>
+          </a:p>
+          <a:p>
+            <a:pPr algn="l" indent="0" marL="0">
+              <a:spcAft>
+                <a:spcPts val="300"/>
+              </a:spcAft>
+              <a:buNone/>
+            </a:pPr>
+            <a:r>
               <a:rPr lang="en-US" sz="1300" dirty="0">
                 <a:solidFill>
                   <a:srgbClr val="2B1B3D"/>
@@ -10972,9 +10719,219 @@
                 <a:ea typeface="Calibri" pitchFamily="34" charset="-122"/>
                 <a:cs typeface="Calibri" pitchFamily="34" charset="-120"/>
               </a:rPr>
-              <a:t>Find the guided walkthrough under the OWL menu in Condor.</a:t>
-            </a:r>
-            <a:endParaRPr lang="en-US" sz="1300" dirty="0"/>
+              <a:t>Restricted variables still appear on Basket Management with the reason, so you can see what was left out.</a:t>
+            </a:r>
+            <a:endParaRPr lang="en-US" sz="1500" dirty="0"/>
+          </a:p>
+        </p:txBody>
+      </p:sp>
+      <p:sp>
+        <p:nvSpPr>
+          <p:cNvPr id="10" name="Text 6"/>
+          <p:cNvSpPr txBox="1"/>
+          <p:nvPr/>
+        </p:nvSpPr>
+        <p:spPr>
+          <a:xfrm>
+            <a:off x="7772400" y="1463040"/>
+            <a:ext cx="3867912" cy="1280160"/>
+          </a:xfrm>
+          <a:prstGeom prst="roundRect">
+            <a:avLst>
+              <a:gd name="adj" fmla="val 7143"/>
+            </a:avLst>
+          </a:prstGeom>
+          <a:solidFill>
+            <a:srgbClr val="F7DDE6"/>
+          </a:solidFill>
+          <a:ln w="9525">
+            <a:solidFill>
+              <a:srgbClr val="C2547D"/>
+            </a:solidFill>
+          </a:ln>
+        </p:spPr>
+        <p:txBody>
+          <a:bodyPr wrap="square" lIns="101600" tIns="152400" rIns="152400" bIns="101600" rtlCol="0" anchor="ctr"/>
+          <a:lstStyle/>
+          <a:p>
+            <a:pPr algn="l" indent="0" marL="0">
+              <a:spcAft>
+                <a:spcPts val="300"/>
+              </a:spcAft>
+              <a:buNone/>
+            </a:pPr>
+            <a:r>
+              <a:rPr lang="en-US" sz="1500" b="1" dirty="0">
+                <a:solidFill>
+                  <a:srgbClr val="6B1F3B"/>
+                </a:solidFill>
+                <a:latin typeface="Calibri" pitchFamily="34" charset="0"/>
+                <a:ea typeface="Calibri" pitchFamily="34" charset="-122"/>
+                <a:cs typeface="Calibri" pitchFamily="34" charset="-120"/>
+              </a:rPr>
+              <a:t>What it means</a:t>
+            </a:r>
+            <a:endParaRPr lang="en-US" sz="1500" dirty="0"/>
+          </a:p>
+          <a:p>
+            <a:pPr algn="l" indent="0" marL="0">
+              <a:spcAft>
+                <a:spcPts val="300"/>
+              </a:spcAft>
+              <a:buNone/>
+            </a:pPr>
+            <a:r>
+              <a:rPr lang="en-US" sz="1300" dirty="0">
+                <a:solidFill>
+                  <a:srgbClr val="2B1B3D"/>
+                </a:solidFill>
+                <a:latin typeface="Calibri" pitchFamily="34" charset="0"/>
+                <a:ea typeface="Calibri" pitchFamily="34" charset="-122"/>
+                <a:cs typeface="Calibri" pitchFamily="34" charset="-120"/>
+              </a:rPr>
+              <a:t>You cannot add this variable to a basket.</a:t>
+            </a:r>
+            <a:endParaRPr lang="en-US" sz="1500" dirty="0"/>
+          </a:p>
+        </p:txBody>
+      </p:sp>
+      <p:sp>
+        <p:nvSpPr>
+          <p:cNvPr id="11" name="Text 7"/>
+          <p:cNvSpPr txBox="1"/>
+          <p:nvPr/>
+        </p:nvSpPr>
+        <p:spPr>
+          <a:xfrm>
+            <a:off x="7772400" y="2926080"/>
+            <a:ext cx="3867912" cy="1280160"/>
+          </a:xfrm>
+          <a:prstGeom prst="roundRect">
+            <a:avLst>
+              <a:gd name="adj" fmla="val 7143"/>
+            </a:avLst>
+          </a:prstGeom>
+          <a:solidFill>
+            <a:srgbClr val="FCEBD2"/>
+          </a:solidFill>
+          <a:ln w="9525">
+            <a:solidFill>
+              <a:srgbClr val="D9A441"/>
+            </a:solidFill>
+          </a:ln>
+        </p:spPr>
+        <p:txBody>
+          <a:bodyPr wrap="square" lIns="101600" tIns="152400" rIns="152400" bIns="101600" rtlCol="0" anchor="ctr"/>
+          <a:lstStyle/>
+          <a:p>
+            <a:pPr algn="l" indent="0" marL="0">
+              <a:spcAft>
+                <a:spcPts val="300"/>
+              </a:spcAft>
+              <a:buNone/>
+            </a:pPr>
+            <a:r>
+              <a:rPr lang="en-US" sz="1500" b="1" dirty="0">
+                <a:solidFill>
+                  <a:srgbClr val="6B4A16"/>
+                </a:solidFill>
+                <a:latin typeface="Calibri" pitchFamily="34" charset="0"/>
+                <a:ea typeface="Calibri" pitchFamily="34" charset="-122"/>
+                <a:cs typeface="Calibri" pitchFamily="34" charset="-120"/>
+              </a:rPr>
+              <a:t>Why?</a:t>
+            </a:r>
+            <a:endParaRPr lang="en-US" sz="1500" dirty="0"/>
+          </a:p>
+          <a:p>
+            <a:pPr algn="l" indent="0" marL="0">
+              <a:spcAft>
+                <a:spcPts val="300"/>
+              </a:spcAft>
+              <a:buNone/>
+            </a:pPr>
+            <a:r>
+              <a:rPr lang="en-US" sz="1300" dirty="0">
+                <a:solidFill>
+                  <a:srgbClr val="2B1B3D"/>
+                </a:solidFill>
+                <a:latin typeface="Calibri" pitchFamily="34" charset="0"/>
+                <a:ea typeface="Calibri" pitchFamily="34" charset="-122"/>
+                <a:cs typeface="Calibri" pitchFamily="34" charset="-120"/>
+              </a:rPr>
+              <a:t>Hover over the padlock to see the reason and who to ask.</a:t>
+            </a:r>
+            <a:endParaRPr lang="en-US" sz="1500" dirty="0"/>
+          </a:p>
+        </p:txBody>
+      </p:sp>
+      <p:sp>
+        <p:nvSpPr>
+          <p:cNvPr id="12" name="Text 8"/>
+          <p:cNvSpPr txBox="1"/>
+          <p:nvPr/>
+        </p:nvSpPr>
+        <p:spPr>
+          <a:xfrm>
+            <a:off x="7772400" y="4389120"/>
+            <a:ext cx="3867912" cy="1280160"/>
+          </a:xfrm>
+          <a:prstGeom prst="roundRect">
+            <a:avLst>
+              <a:gd name="adj" fmla="val 7143"/>
+            </a:avLst>
+          </a:prstGeom>
+          <a:solidFill>
+            <a:srgbClr val="DFF2E1"/>
+          </a:solidFill>
+          <a:ln w="9525">
+            <a:solidFill>
+              <a:srgbClr val="5FA873"/>
+            </a:solidFill>
+          </a:ln>
+        </p:spPr>
+        <p:txBody>
+          <a:bodyPr wrap="square" lIns="101600" tIns="152400" rIns="152400" bIns="101600" rtlCol="0" anchor="ctr"/>
+          <a:lstStyle/>
+          <a:p>
+            <a:pPr algn="l" indent="0" marL="0">
+              <a:spcAft>
+                <a:spcPts val="300"/>
+              </a:spcAft>
+              <a:buNone/>
+            </a:pPr>
+            <a:r>
+              <a:rPr lang="en-US" sz="1500" b="1" dirty="0">
+                <a:solidFill>
+                  <a:srgbClr val="205C2E"/>
+                </a:solidFill>
+                <a:latin typeface="Calibri" pitchFamily="34" charset="0"/>
+                <a:ea typeface="Calibri" pitchFamily="34" charset="-122"/>
+                <a:cs typeface="Calibri" pitchFamily="34" charset="-120"/>
+              </a:rPr>
+              <a:t>Need access?</a:t>
+            </a:r>
+            <a:endParaRPr lang="en-US" sz="1500" dirty="0"/>
+          </a:p>
+          <a:p>
+            <a:pPr algn="l" indent="0" marL="0">
+              <a:spcAft>
+                <a:spcPts val="300"/>
+              </a:spcAft>
+              <a:buNone/>
+            </a:pPr>
+            <a:r>
+              <a:rPr lang="en-US" sz="1300" dirty="0">
+                <a:solidFill>
+                  <a:srgbClr val="2B1B3D"/>
+                </a:solidFill>
+                <a:latin typeface="Calibri" pitchFamily="34" charset="0"/>
+                <a:ea typeface="Calibri" pitchFamily="34" charset="-122"/>
+                <a:cs typeface="Calibri" pitchFamily="34" charset="-120"/>
+              </a:rPr>
+              <a:t>Contact LHA using the link in the site footer.</a:t>
+            </a:r>
+            <a:endParaRPr lang="en-US" sz="1500" dirty="0"/>
           </a:p>
         </p:txBody>
       </p:sp>
@@ -11090,7 +11047,7 @@
                 <a:ea typeface="Cambria" pitchFamily="34" charset="-122"/>
                 <a:cs typeface="Cambria" pitchFamily="34" charset="-120"/>
               </a:rPr>
-              <a:t>Recap and where to get help</a:t>
+              <a:t>Condor and OWL</a:t>
             </a:r>
             <a:endParaRPr lang="en-US" sz="3000" dirty="0"/>
           </a:p>
@@ -11169,6 +11126,580 @@
                 <a:cs typeface="Calibri" pitchFamily="34" charset="-120"/>
               </a:rPr>
               <a:t>22</a:t>
+            </a:r>
+            <a:endParaRPr lang="en-US" sz="1000" dirty="0"/>
+          </a:p>
+        </p:txBody>
+      </p:sp>
+      <p:sp>
+        <p:nvSpPr>
+          <p:cNvPr id="6" name="Text 4"/>
+          <p:cNvSpPr txBox="1"/>
+          <p:nvPr/>
+        </p:nvSpPr>
+        <p:spPr>
+          <a:xfrm>
+            <a:off x="548640" y="1371600"/>
+            <a:ext cx="5408676" cy="3429000"/>
+          </a:xfrm>
+          <a:prstGeom prst="roundRect">
+            <a:avLst>
+              <a:gd name="adj" fmla="val 2667"/>
+            </a:avLst>
+          </a:prstGeom>
+          <a:solidFill>
+            <a:srgbClr val="E8DFF5"/>
+          </a:solidFill>
+          <a:ln w="9525">
+            <a:solidFill>
+              <a:srgbClr val="8C6BC2"/>
+            </a:solidFill>
+          </a:ln>
+        </p:spPr>
+        <p:txBody>
+          <a:bodyPr wrap="square" lIns="101600" tIns="152400" rIns="152400" bIns="101600" rtlCol="0" anchor="t"/>
+          <a:lstStyle/>
+          <a:p>
+            <a:pPr algn="l" indent="0" marL="0">
+              <a:spcAft>
+                <a:spcPts val="300"/>
+              </a:spcAft>
+              <a:buNone/>
+            </a:pPr>
+            <a:r>
+              <a:rPr lang="en-US" sz="2000" b="1" dirty="0">
+                <a:solidFill>
+                  <a:srgbClr val="3D2463"/>
+                </a:solidFill>
+                <a:latin typeface="Calibri" pitchFamily="34" charset="0"/>
+                <a:ea typeface="Calibri" pitchFamily="34" charset="-122"/>
+                <a:cs typeface="Calibri" pitchFamily="34" charset="-120"/>
+              </a:rPr>
+              <a:t>Condor</a:t>
+            </a:r>
+            <a:endParaRPr lang="en-US" sz="2000" dirty="0"/>
+          </a:p>
+        </p:txBody>
+      </p:sp>
+      <p:sp>
+        <p:nvSpPr>
+          <p:cNvPr id="7" name="Text 5"/>
+          <p:cNvSpPr txBox="1"/>
+          <p:nvPr/>
+        </p:nvSpPr>
+        <p:spPr>
+          <a:xfrm>
+            <a:off x="777240" y="2194560"/>
+            <a:ext cx="4951476" cy="2468880"/>
+          </a:xfrm>
+          <a:prstGeom prst="rect">
+            <a:avLst/>
+          </a:prstGeom>
+          <a:noFill/>
+          <a:ln/>
+        </p:spPr>
+        <p:txBody>
+          <a:bodyPr wrap="square" lIns="0" tIns="0" rIns="0" bIns="0" rtlCol="0" anchor="t"/>
+          <a:lstStyle/>
+          <a:p>
+            <a:pPr indent="0" marL="0">
+              <a:spcAft>
+                <a:spcPts val="1400"/>
+              </a:spcAft>
+              <a:buNone/>
+            </a:pPr>
+            <a:r>
+              <a:rPr lang="en-US" sz="1700" dirty="0">
+                <a:solidFill>
+                  <a:srgbClr val="2B1B3D"/>
+                </a:solidFill>
+                <a:latin typeface="Calibri" pitchFamily="34" charset="0"/>
+                <a:ea typeface="Calibri" pitchFamily="34" charset="-122"/>
+                <a:cs typeface="Calibri" pitchFamily="34" charset="-120"/>
+              </a:rPr>
+              <a:t>✓  Search by name, keyword, category or library</a:t>
+            </a:r>
+            <a:endParaRPr lang="en-US" sz="1700" dirty="0"/>
+          </a:p>
+          <a:p>
+            <a:pPr indent="0" marL="0">
+              <a:spcAft>
+                <a:spcPts val="1400"/>
+              </a:spcAft>
+              <a:buNone/>
+            </a:pPr>
+            <a:r>
+              <a:rPr lang="en-US" sz="1700" dirty="0">
+                <a:solidFill>
+                  <a:srgbClr val="2B1B3D"/>
+                </a:solidFill>
+                <a:latin typeface="Calibri" pitchFamily="34" charset="0"/>
+                <a:ea typeface="Calibri" pitchFamily="34" charset="-122"/>
+                <a:cs typeface="Calibri" pitchFamily="34" charset="-120"/>
+              </a:rPr>
+              <a:t>✓  Build, save, load and share baskets</a:t>
+            </a:r>
+            <a:endParaRPr lang="en-US" sz="1700" dirty="0"/>
+          </a:p>
+          <a:p>
+            <a:pPr indent="0" marL="0">
+              <a:spcAft>
+                <a:spcPts val="1400"/>
+              </a:spcAft>
+              <a:buNone/>
+            </a:pPr>
+            <a:r>
+              <a:rPr lang="en-US" sz="1700" dirty="0">
+                <a:solidFill>
+                  <a:srgbClr val="2B1B3D"/>
+                </a:solidFill>
+                <a:latin typeface="Calibri" pitchFamily="34" charset="0"/>
+                <a:ea typeface="Calibri" pitchFamily="34" charset="-122"/>
+                <a:cs typeface="Calibri" pitchFamily="34" charset="-120"/>
+              </a:rPr>
+              <a:t>✓  Prepare a data request for LHA</a:t>
+            </a:r>
+            <a:endParaRPr lang="en-US" sz="1700" dirty="0"/>
+          </a:p>
+          <a:p>
+            <a:pPr indent="0" marL="0">
+              <a:spcAft>
+                <a:spcPts val="1400"/>
+              </a:spcAft>
+              <a:buNone/>
+            </a:pPr>
+            <a:r>
+              <a:rPr lang="en-US" sz="1700" dirty="0">
+                <a:solidFill>
+                  <a:srgbClr val="2B1B3D"/>
+                </a:solidFill>
+                <a:latin typeface="Calibri" pitchFamily="34" charset="0"/>
+                <a:ea typeface="Calibri" pitchFamily="34" charset="-122"/>
+                <a:cs typeface="Calibri" pitchFamily="34" charset="-120"/>
+              </a:rPr>
+              <a:t>✓  Needs an approved Condor account</a:t>
+            </a:r>
+            <a:endParaRPr lang="en-US" sz="1700" dirty="0"/>
+          </a:p>
+        </p:txBody>
+      </p:sp>
+      <p:sp>
+        <p:nvSpPr>
+          <p:cNvPr id="8" name="Text 6"/>
+          <p:cNvSpPr txBox="1"/>
+          <p:nvPr/>
+        </p:nvSpPr>
+        <p:spPr>
+          <a:xfrm>
+            <a:off x="6231636" y="1371600"/>
+            <a:ext cx="5408676" cy="3429000"/>
+          </a:xfrm>
+          <a:prstGeom prst="roundRect">
+            <a:avLst>
+              <a:gd name="adj" fmla="val 2667"/>
+            </a:avLst>
+          </a:prstGeom>
+          <a:solidFill>
+            <a:srgbClr val="D7F0EE"/>
+          </a:solidFill>
+          <a:ln w="9525">
+            <a:solidFill>
+              <a:srgbClr val="4FA69E"/>
+            </a:solidFill>
+          </a:ln>
+        </p:spPr>
+        <p:txBody>
+          <a:bodyPr wrap="square" lIns="101600" tIns="152400" rIns="152400" bIns="101600" rtlCol="0" anchor="t"/>
+          <a:lstStyle/>
+          <a:p>
+            <a:pPr algn="l" indent="0" marL="0">
+              <a:spcAft>
+                <a:spcPts val="300"/>
+              </a:spcAft>
+              <a:buNone/>
+            </a:pPr>
+            <a:r>
+              <a:rPr lang="en-US" sz="2000" b="1" dirty="0">
+                <a:solidFill>
+                  <a:srgbClr val="0F4C4A"/>
+                </a:solidFill>
+                <a:latin typeface="Calibri" pitchFamily="34" charset="0"/>
+                <a:ea typeface="Calibri" pitchFamily="34" charset="-122"/>
+                <a:cs typeface="Calibri" pitchFamily="34" charset="-120"/>
+              </a:rPr>
+              <a:t>OWL</a:t>
+            </a:r>
+            <a:endParaRPr lang="en-US" sz="2000" dirty="0"/>
+          </a:p>
+        </p:txBody>
+      </p:sp>
+      <p:pic>
+        <p:nvPicPr>
+          <p:cNvPr id="9" name="Image 0" descr="/home/claude/condor_deck/img/owl.png">    </p:cNvPr>
+          <p:cNvPicPr>
+            <a:picLocks noChangeAspect="1"/>
+          </p:cNvPicPr>
+          <p:nvPr/>
+        </p:nvPicPr>
+        <p:blipFill>
+          <a:blip r:embed="rId1"/>
+          <a:stretch>
+            <a:fillRect/>
+          </a:stretch>
+        </p:blipFill>
+        <p:spPr>
+          <a:xfrm>
+            <a:off x="10771632" y="1508760"/>
+            <a:ext cx="548640" cy="752785"/>
+          </a:xfrm>
+          <a:prstGeom prst="rect">
+            <a:avLst/>
+          </a:prstGeom>
+        </p:spPr>
+      </p:pic>
+      <p:sp>
+        <p:nvSpPr>
+          <p:cNvPr id="10" name="Text 7"/>
+          <p:cNvSpPr txBox="1"/>
+          <p:nvPr/>
+        </p:nvSpPr>
+        <p:spPr>
+          <a:xfrm>
+            <a:off x="6460236" y="2194560"/>
+            <a:ext cx="4951476" cy="2468880"/>
+          </a:xfrm>
+          <a:prstGeom prst="rect">
+            <a:avLst/>
+          </a:prstGeom>
+          <a:noFill/>
+          <a:ln/>
+        </p:spPr>
+        <p:txBody>
+          <a:bodyPr wrap="square" lIns="0" tIns="0" rIns="0" bIns="0" rtlCol="0" anchor="t"/>
+          <a:lstStyle/>
+          <a:p>
+            <a:pPr indent="0" marL="0">
+              <a:spcAft>
+                <a:spcPts val="1400"/>
+              </a:spcAft>
+              <a:buNone/>
+            </a:pPr>
+            <a:r>
+              <a:rPr lang="en-US" sz="1700" dirty="0">
+                <a:solidFill>
+                  <a:srgbClr val="2B1B3D"/>
+                </a:solidFill>
+                <a:latin typeface="Calibri" pitchFamily="34" charset="0"/>
+                <a:ea typeface="Calibri" pitchFamily="34" charset="-122"/>
+                <a:cs typeface="Calibri" pitchFamily="34" charset="-120"/>
+              </a:rPr>
+              <a:t>✓  Public metadata platform</a:t>
+            </a:r>
+            <a:endParaRPr lang="en-US" sz="1700" dirty="0"/>
+          </a:p>
+          <a:p>
+            <a:pPr indent="0" marL="0">
+              <a:spcAft>
+                <a:spcPts val="1400"/>
+              </a:spcAft>
+              <a:buNone/>
+            </a:pPr>
+            <a:r>
+              <a:rPr lang="en-US" sz="1700" dirty="0">
+                <a:solidFill>
+                  <a:srgbClr val="2B1B3D"/>
+                </a:solidFill>
+                <a:latin typeface="Calibri" pitchFamily="34" charset="0"/>
+                <a:ea typeface="Calibri" pitchFamily="34" charset="-122"/>
+                <a:cs typeface="Calibri" pitchFamily="34" charset="-120"/>
+              </a:rPr>
+              <a:t>✓  No Condor account needed</a:t>
+            </a:r>
+            <a:endParaRPr lang="en-US" sz="1700" dirty="0"/>
+          </a:p>
+          <a:p>
+            <a:pPr indent="0" marL="0">
+              <a:spcAft>
+                <a:spcPts val="1400"/>
+              </a:spcAft>
+              <a:buNone/>
+            </a:pPr>
+            <a:r>
+              <a:rPr lang="en-US" sz="1700" dirty="0">
+                <a:solidFill>
+                  <a:srgbClr val="2B1B3D"/>
+                </a:solidFill>
+                <a:latin typeface="Calibri" pitchFamily="34" charset="0"/>
+                <a:ea typeface="Calibri" pitchFamily="34" charset="-122"/>
+                <a:cs typeface="Calibri" pitchFamily="34" charset="-120"/>
+              </a:rPr>
+              <a:t>✓  Guided walkthrough for first-time users</a:t>
+            </a:r>
+            <a:endParaRPr lang="en-US" sz="1700" dirty="0"/>
+          </a:p>
+          <a:p>
+            <a:pPr indent="0" marL="0">
+              <a:spcAft>
+                <a:spcPts val="1400"/>
+              </a:spcAft>
+              <a:buNone/>
+            </a:pPr>
+            <a:r>
+              <a:rPr lang="en-US" sz="1700" dirty="0">
+                <a:solidFill>
+                  <a:srgbClr val="2B1B3D"/>
+                </a:solidFill>
+                <a:latin typeface="Calibri" pitchFamily="34" charset="0"/>
+                <a:ea typeface="Calibri" pitchFamily="34" charset="-122"/>
+                <a:cs typeface="Calibri" pitchFamily="34" charset="-120"/>
+              </a:rPr>
+              <a:t>✓  The owl icon in Condor links straight to a variable's OWL page</a:t>
+            </a:r>
+            <a:endParaRPr lang="en-US" sz="1700" dirty="0"/>
+          </a:p>
+        </p:txBody>
+      </p:sp>
+      <p:sp>
+        <p:nvSpPr>
+          <p:cNvPr id="11" name="Text 8"/>
+          <p:cNvSpPr txBox="1"/>
+          <p:nvPr/>
+        </p:nvSpPr>
+        <p:spPr>
+          <a:xfrm>
+            <a:off x="548640" y="5120640"/>
+            <a:ext cx="11091672" cy="640080"/>
+          </a:xfrm>
+          <a:prstGeom prst="roundRect">
+            <a:avLst>
+              <a:gd name="adj" fmla="val 14286"/>
+            </a:avLst>
+          </a:prstGeom>
+          <a:solidFill>
+            <a:srgbClr val="DCE8F7"/>
+          </a:solidFill>
+          <a:ln w="9525">
+            <a:solidFill>
+              <a:srgbClr val="5B84B5"/>
+            </a:solidFill>
+          </a:ln>
+        </p:spPr>
+        <p:txBody>
+          <a:bodyPr wrap="square" lIns="101600" tIns="152400" rIns="152400" bIns="101600" rtlCol="0" anchor="ctr"/>
+          <a:lstStyle/>
+          <a:p>
+            <a:pPr algn="l" indent="0" marL="0">
+              <a:spcAft>
+                <a:spcPts val="300"/>
+              </a:spcAft>
+              <a:buNone/>
+            </a:pPr>
+            <a:r>
+              <a:rPr lang="en-US" sz="1300" dirty="0">
+                <a:solidFill>
+                  <a:srgbClr val="2B1B3D"/>
+                </a:solidFill>
+                <a:latin typeface="Calibri" pitchFamily="34" charset="0"/>
+                <a:ea typeface="Calibri" pitchFamily="34" charset="-122"/>
+                <a:cs typeface="Calibri" pitchFamily="34" charset="-120"/>
+              </a:rPr>
+              <a:t>Find the guided walkthrough under the OWL menu in Condor.</a:t>
+            </a:r>
+            <a:endParaRPr lang="en-US" sz="1300" dirty="0"/>
+          </a:p>
+        </p:txBody>
+      </p:sp>
+    </p:spTree>
+  </p:cSld>
+  <p:clrMapOvr>
+    <a:masterClrMapping/>
+  </p:clrMapOvr>
+</p:sld>
+</file>
+
+<file path=ppt/slides/slide23.xml><?xml version="1.0" encoding="utf-8"?>
+<p:sld xmlns:a="http://schemas.openxmlformats.org/drawingml/2006/main" xmlns:r="http://schemas.openxmlformats.org/officeDocument/2006/relationships" xmlns:p="http://schemas.openxmlformats.org/presentationml/2006/main">
+  <p:cSld name="Slide 23">
+    <p:bg>
+      <p:bgPr>
+        <a:solidFill>
+          <a:srgbClr val="FFFFFF"/>
+        </a:solidFill>
+      </p:bgPr>
+    </p:bg>
+    <p:spTree>
+      <p:nvGrpSpPr>
+        <p:cNvPr id="1" name=""/>
+        <p:cNvGrpSpPr/>
+        <p:nvPr/>
+      </p:nvGrpSpPr>
+      <p:grpSpPr>
+        <a:xfrm>
+          <a:off x="0" y="0"/>
+          <a:ext cx="0" cy="0"/>
+          <a:chOff x="0" y="0"/>
+          <a:chExt cx="0" cy="0"/>
+        </a:xfrm>
+      </p:grpSpPr>
+      <p:sp>
+        <p:nvSpPr>
+          <p:cNvPr id="2" name="Text 0"/>
+          <p:cNvSpPr txBox="1"/>
+          <p:nvPr/>
+        </p:nvSpPr>
+        <p:spPr>
+          <a:xfrm>
+            <a:off x="548640" y="347472"/>
+            <a:ext cx="1545336" cy="274320"/>
+          </a:xfrm>
+          <a:prstGeom prst="roundRect">
+            <a:avLst>
+              <a:gd name="adj" fmla="val 50000"/>
+            </a:avLst>
+          </a:prstGeom>
+          <a:solidFill>
+            <a:srgbClr val="DFF2E1"/>
+          </a:solidFill>
+          <a:ln w="9525">
+            <a:solidFill>
+              <a:srgbClr val="5FA873"/>
+            </a:solidFill>
+          </a:ln>
+        </p:spPr>
+        <p:txBody>
+          <a:bodyPr wrap="square" lIns="0" tIns="0" rIns="0" bIns="0" rtlCol="0" anchor="ctr"/>
+          <a:lstStyle/>
+          <a:p>
+            <a:pPr algn="ctr" indent="0" marL="0">
+              <a:buNone/>
+            </a:pPr>
+            <a:r>
+              <a:rPr lang="en-US" sz="1000" b="1" spc="100" kern="0" dirty="0">
+                <a:solidFill>
+                  <a:srgbClr val="205C2E"/>
+                </a:solidFill>
+                <a:latin typeface="Calibri" pitchFamily="34" charset="0"/>
+                <a:ea typeface="Calibri" pitchFamily="34" charset="-122"/>
+                <a:cs typeface="Calibri" pitchFamily="34" charset="-120"/>
+              </a:rPr>
+              <a:t>REUSE AND HELP</a:t>
+            </a:r>
+            <a:endParaRPr lang="en-US" sz="1000" dirty="0"/>
+          </a:p>
+        </p:txBody>
+      </p:sp>
+      <p:sp>
+        <p:nvSpPr>
+          <p:cNvPr id="3" name="Text 1"/>
+          <p:cNvSpPr txBox="1"/>
+          <p:nvPr/>
+        </p:nvSpPr>
+        <p:spPr>
+          <a:xfrm>
+            <a:off x="548640" y="658368"/>
+            <a:ext cx="11091672" cy="566928"/>
+          </a:xfrm>
+          <a:prstGeom prst="rect">
+            <a:avLst/>
+          </a:prstGeom>
+          <a:noFill/>
+          <a:ln/>
+        </p:spPr>
+        <p:txBody>
+          <a:bodyPr wrap="square" lIns="0" tIns="0" rIns="0" bIns="0" rtlCol="0" anchor="ctr"/>
+          <a:lstStyle/>
+          <a:p>
+            <a:pPr indent="0" marL="0">
+              <a:buNone/>
+            </a:pPr>
+            <a:r>
+              <a:rPr lang="en-US" sz="3000" b="1" dirty="0">
+                <a:solidFill>
+                  <a:srgbClr val="3A0066"/>
+                </a:solidFill>
+                <a:latin typeface="Cambria" pitchFamily="34" charset="0"/>
+                <a:ea typeface="Cambria" pitchFamily="34" charset="-122"/>
+                <a:cs typeface="Cambria" pitchFamily="34" charset="-120"/>
+              </a:rPr>
+              <a:t>Recap and where to get help</a:t>
+            </a:r>
+            <a:endParaRPr lang="en-US" sz="3000" dirty="0"/>
+          </a:p>
+        </p:txBody>
+      </p:sp>
+      <p:sp>
+        <p:nvSpPr>
+          <p:cNvPr id="4" name="Text 2"/>
+          <p:cNvSpPr txBox="1"/>
+          <p:nvPr/>
+        </p:nvSpPr>
+        <p:spPr>
+          <a:xfrm>
+            <a:off x="548640" y="6446520"/>
+            <a:ext cx="2743200" cy="274320"/>
+          </a:xfrm>
+          <a:prstGeom prst="rect">
+            <a:avLst/>
+          </a:prstGeom>
+          <a:noFill/>
+          <a:ln/>
+        </p:spPr>
+        <p:txBody>
+          <a:bodyPr wrap="square" lIns="0" tIns="0" rIns="0" bIns="0" rtlCol="0" anchor="ctr"/>
+          <a:lstStyle/>
+          <a:p>
+            <a:pPr indent="0" marL="0">
+              <a:buNone/>
+            </a:pPr>
+            <a:r>
+              <a:rPr lang="en-US" sz="1000" dirty="0">
+                <a:solidFill>
+                  <a:srgbClr val="6B6478"/>
+                </a:solidFill>
+                <a:latin typeface="Calibri" pitchFamily="34" charset="0"/>
+                <a:ea typeface="Calibri" pitchFamily="34" charset="-122"/>
+                <a:cs typeface="Calibri" pitchFamily="34" charset="-120"/>
+              </a:rPr>
+              <a:t>Condor 4.0</a:t>
+            </a:r>
+            <a:endParaRPr lang="en-US" sz="1000" dirty="0"/>
+          </a:p>
+        </p:txBody>
+      </p:sp>
+      <p:sp>
+        <p:nvSpPr>
+          <p:cNvPr id="5" name="Text 3"/>
+          <p:cNvSpPr txBox="1"/>
+          <p:nvPr/>
+        </p:nvSpPr>
+        <p:spPr>
+          <a:xfrm>
+            <a:off x="11548872" y="6446520"/>
+            <a:ext cx="365760" cy="274320"/>
+          </a:xfrm>
+          <a:prstGeom prst="rect">
+            <a:avLst/>
+          </a:prstGeom>
+          <a:noFill/>
+          <a:ln/>
+        </p:spPr>
+        <p:txBody>
+          <a:bodyPr wrap="square" lIns="0" tIns="0" rIns="0" bIns="0" rtlCol="0" anchor="ctr"/>
+          <a:lstStyle/>
+          <a:p>
+            <a:pPr algn="r" indent="0" marL="0">
+              <a:buNone/>
+            </a:pPr>
+            <a:r>
+              <a:rPr lang="en-US" sz="1000" dirty="0">
+                <a:solidFill>
+                  <a:srgbClr val="6B6478"/>
+                </a:solidFill>
+                <a:latin typeface="Calibri" pitchFamily="34" charset="0"/>
+                <a:ea typeface="Calibri" pitchFamily="34" charset="-122"/>
+                <a:cs typeface="Calibri" pitchFamily="34" charset="-120"/>
+              </a:rPr>
+              <a:t>23</a:t>
             </a:r>
             <a:endParaRPr lang="en-US" sz="1000" dirty="0"/>
           </a:p>
